--- a/reports/deck/MASLD_zonation_reanalysis_8min.pptx
+++ b/reports/deck/MASLD_zonation_reanalysis_8min.pptx
@@ -24,9 +24,11 @@
     <p:sldId id="272" r:id="rId18"/>
     <p:sldId id="273" r:id="rId19"/>
     <p:sldId id="274" r:id="rId20"/>
+    <p:sldId id="275" r:id="rId21"/>
+    <p:sldId id="276" r:id="rId22"/>
   </p:sldIdLst>
   <p:notesMasterIdLst>
-    <p:notesMasterId r:id="rId21"/>
+    <p:notesMasterId r:id="rId23"/>
   </p:notesMasterIdLst>
   <p:sldSz cx="12192000" cy="6858000"/>
   <p:notesSz cx="6858000" cy="12192000"/>
@@ -520,7 +522,7 @@
           <a:p>
             <a:r>
               <a:rPr lang="en-US" dirty="0"/>
-              <a:t>Open: the paper's biological claim is exciting — chronic liver disease may make hepatocytes lose zonation and move toward a biliary/cholangiocyte state. We asked whether the single-nucleus EXPRESSION evidence supports that once acquisition differences between samples are controlled. One-line answer up front: in matched needle biopsies, zonation is preserved.</a:t>
+              <a:t>Open: the paper's claim is exciting — as chronic liver disease progresses, hepatocytes lose their zonation, and the most de-zonated ones move toward a biliary/cholangiocyte identity (the headline plasticity finding). Note these are two distinct axes: de-zonation = losing your position along the lobule (still a hepatocyte); transdifferentiation = losing your cell-type identity. We asked whether the single-nucleus EXPRESSION evidence for progressive de-zonation survives once acquisition differences are controlled. Answer up front: in matched needle biopsies, transcriptional zonation is preserved.</a:t>
             </a:r>
             <a:endParaRPr lang="en-US" dirty="0"/>
           </a:p>
@@ -1488,7 +1490,7 @@
           <a:p>
             <a:r>
               <a:rPr lang="en-US" dirty="0"/>
-              <a:t>Audience knows hepatocytes and snRNA-seq, so only what's needed: zonation = different hepatocytes run different programs by lobule position. It can break down several ways — cells disappear, turn markers off, co-express both poles, or shift composition. This matters because one correlation score or UMAP can conflate very different mechanisms, so we use count signatures tied to specific scenarios.</a:t>
+              <a:t>Only what's needed: zonation = different hepatocytes run different programs by lobule position. The zonation EXPRESSION signal can break down several ways — cells disappear, turn markers off, co-express both poles, or shift composition. We list CYP2E1 as a familiar pericentral marker, but the strict ANCHOR classification uses GLUL and CYP3A4 only. A single correlation score or UMAP conflates these mechanisms, so we use count signatures tied to each.</a:t>
             </a:r>
             <a:endParaRPr lang="en-US" dirty="0"/>
           </a:p>
@@ -1512,6 +1514,182 @@
             <a:fld id="{F7021451-1387-4CA6-816F-3879F97B5CBC}" type="slidenum">
               <a:rPr lang="en-US"/>
               <a:t>2</a:t>
+            </a:fld>
+            <a:endParaRPr lang="en-US"/>
+          </a:p>
+        </p:txBody>
+      </p:sp>
+    </p:spTree>
+    <p:extLst>
+      <p:ext uri="{BB962C8B-B14F-4D97-AF65-F5344CB8AC3E}">
+        <p14:creationId xmlns:p14="http://schemas.microsoft.com/office/powerpoint/2010/main" val="1024086991"/>
+      </p:ext>
+    </p:extLst>
+  </p:cSld>
+  <p:clrMapOvr>
+    <a:masterClrMapping/>
+  </p:clrMapOvr>
+</p:notes>
+</file>
+
+<file path=ppt/notesSlides/notesSlide20.xml><?xml version="1.0" encoding="utf-8"?>
+<p:notes xmlns:a="http://schemas.openxmlformats.org/drawingml/2006/main" xmlns:r="http://schemas.openxmlformats.org/officeDocument/2006/relationships" xmlns:p="http://schemas.openxmlformats.org/presentationml/2006/main">
+  <p:cSld>
+    <p:spTree>
+      <p:nvGrpSpPr>
+        <p:cNvPr id="1" name=""/>
+        <p:cNvGrpSpPr/>
+        <p:nvPr/>
+      </p:nvGrpSpPr>
+      <p:grpSpPr>
+        <a:xfrm>
+          <a:off x="0" y="0"/>
+          <a:ext cx="0" cy="0"/>
+          <a:chOff x="0" y="0"/>
+          <a:chExt cx="0" cy="0"/>
+        </a:xfrm>
+      </p:grpSpPr>
+      <p:sp>
+        <p:nvSpPr>
+          <p:cNvPr id="2" name="Slide Image Placeholder 1"/>
+          <p:cNvSpPr>
+            <a:spLocks noGrp="1" noRot="1" noChangeAspect="1"/>
+          </p:cNvSpPr>
+          <p:nvPr>
+            <p:ph type="sldImg"/>
+          </p:nvPr>
+        </p:nvSpPr>
+        <p:spPr/>
+      </p:sp>
+      <p:sp>
+        <p:nvSpPr>
+          <p:cNvPr id="3" name="Notes Placeholder 2"/>
+          <p:cNvSpPr>
+            <a:spLocks noGrp="1"/>
+          </p:cNvSpPr>
+          <p:nvPr>
+            <p:ph type="body" idx="1"/>
+          </p:nvPr>
+        </p:nvSpPr>
+        <p:spPr/>
+        <p:txBody>
+          <a:bodyPr/>
+          <a:lstStyle/>
+          <a:p>
+            <a:r>
+              <a:rPr lang="en-US" dirty="0"/>
+              <a:t/>
+            </a:r>
+            <a:endParaRPr lang="en-US" dirty="0"/>
+          </a:p>
+        </p:txBody>
+      </p:sp>
+      <p:sp>
+        <p:nvSpPr>
+          <p:cNvPr id="4" name="Slide Number Placeholder 3"/>
+          <p:cNvSpPr>
+            <a:spLocks noGrp="1"/>
+          </p:cNvSpPr>
+          <p:nvPr>
+            <p:ph type="sldNum" sz="quarter" idx="10"/>
+          </p:nvPr>
+        </p:nvSpPr>
+        <p:spPr/>
+        <p:txBody>
+          <a:bodyPr/>
+          <a:lstStyle/>
+          <a:p>
+            <a:fld id="{F7021451-1387-4CA6-816F-3879F97B5CBC}" type="slidenum">
+              <a:rPr lang="en-US"/>
+              <a:t>20</a:t>
+            </a:fld>
+            <a:endParaRPr lang="en-US"/>
+          </a:p>
+        </p:txBody>
+      </p:sp>
+    </p:spTree>
+    <p:extLst>
+      <p:ext uri="{BB962C8B-B14F-4D97-AF65-F5344CB8AC3E}">
+        <p14:creationId xmlns:p14="http://schemas.microsoft.com/office/powerpoint/2010/main" val="1024086991"/>
+      </p:ext>
+    </p:extLst>
+  </p:cSld>
+  <p:clrMapOvr>
+    <a:masterClrMapping/>
+  </p:clrMapOvr>
+</p:notes>
+</file>
+
+<file path=ppt/notesSlides/notesSlide21.xml><?xml version="1.0" encoding="utf-8"?>
+<p:notes xmlns:a="http://schemas.openxmlformats.org/drawingml/2006/main" xmlns:r="http://schemas.openxmlformats.org/officeDocument/2006/relationships" xmlns:p="http://schemas.openxmlformats.org/presentationml/2006/main">
+  <p:cSld>
+    <p:spTree>
+      <p:nvGrpSpPr>
+        <p:cNvPr id="1" name=""/>
+        <p:cNvGrpSpPr/>
+        <p:nvPr/>
+      </p:nvGrpSpPr>
+      <p:grpSpPr>
+        <a:xfrm>
+          <a:off x="0" y="0"/>
+          <a:ext cx="0" cy="0"/>
+          <a:chOff x="0" y="0"/>
+          <a:chExt cx="0" cy="0"/>
+        </a:xfrm>
+      </p:grpSpPr>
+      <p:sp>
+        <p:nvSpPr>
+          <p:cNvPr id="2" name="Slide Image Placeholder 1"/>
+          <p:cNvSpPr>
+            <a:spLocks noGrp="1" noRot="1" noChangeAspect="1"/>
+          </p:cNvSpPr>
+          <p:nvPr>
+            <p:ph type="sldImg"/>
+          </p:nvPr>
+        </p:nvSpPr>
+        <p:spPr/>
+      </p:sp>
+      <p:sp>
+        <p:nvSpPr>
+          <p:cNvPr id="3" name="Notes Placeholder 2"/>
+          <p:cNvSpPr>
+            <a:spLocks noGrp="1"/>
+          </p:cNvSpPr>
+          <p:nvPr>
+            <p:ph type="body" idx="1"/>
+          </p:nvPr>
+        </p:nvSpPr>
+        <p:spPr/>
+        <p:txBody>
+          <a:bodyPr/>
+          <a:lstStyle/>
+          <a:p>
+            <a:r>
+              <a:rPr lang="en-US" dirty="0"/>
+              <a:t/>
+            </a:r>
+            <a:endParaRPr lang="en-US" dirty="0"/>
+          </a:p>
+        </p:txBody>
+      </p:sp>
+      <p:sp>
+        <p:nvSpPr>
+          <p:cNvPr id="4" name="Slide Number Placeholder 3"/>
+          <p:cNvSpPr>
+            <a:spLocks noGrp="1"/>
+          </p:cNvSpPr>
+          <p:nvPr>
+            <p:ph type="sldNum" sz="quarter" idx="10"/>
+          </p:nvPr>
+        </p:nvSpPr>
+        <p:spPr/>
+        <p:txBody>
+          <a:bodyPr/>
+          <a:lstStyle/>
+          <a:p>
+            <a:fld id="{F7021451-1387-4CA6-816F-3879F97B5CBC}" type="slidenum">
+              <a:rPr lang="en-US"/>
+              <a:t>21</a:t>
             </a:fld>
             <a:endParaRPr lang="en-US"/>
           </a:p>
@@ -1576,7 +1754,7 @@
           <a:p>
             <a:r>
               <a:rPr lang="en-US" dirty="0"/>
-              <a:t>This is the load-bearing slide. If stage and acquisition are collinear, a progressive trajectory can be manufactured by procurement, ischemia, dissociation, or batch — not biology. Healthy and end-stage are deceased-donor / explant organ tissue; the disease spectrum F0–F4 is fresh needle biopsies. So the first question is not biology, it is comparability. We restrict the disease axis to the matched biopsies, F1–F4.</a:t>
+              <a:t>This is the load-bearing slide. If stage and acquisition are collinear, a progressive trajectory can be manufactured by procurement, ischemia, dissociation, or batch — not biology. Healthy and end-stage are deceased-donor / explant organ tissue; the disease spectrum F0–F4 is fresh needle biopsies. We restrict the disease axis to matched biopsies. On F0 vs F1–F4: F0 has only 2 donors, so primary inference is F1–F4; we show F0 descriptively.</a:t>
             </a:r>
             <a:endParaRPr lang="en-US" dirty="0"/>
           </a:p>
@@ -1664,7 +1842,7 @@
           <a:p>
             <a:r>
               <a:rPr lang="en-US" dirty="0"/>
-              <a:t>The decisive point is cross-lineage. Stress is ~22× higher in end-stage explants than biopsies — but if endothelial cells, which have no zonation program, show the SAME immediate-early spike (18.2× vs 18.5× in hepatocytes), then this is not a hepatocyte zonation program. It is organ-wide acute handling/procurement stress. That is why we exclude the deceased-donor and explant groups from the disease axis.</a:t>
+              <a:t>The decisive point is cross-lineage. Stress is ~22× higher in end-stage explants than biopsies — but if endothelial cells, which have NO zonation program, show the same immediate-early spike (18.2× vs 18.5× in hepatocytes), this cannot be a hepatocyte zonation program. It is organ-wide acute handling/procurement stress. That justifies excluding the deceased-donor and explant groups from the disease axis.</a:t>
             </a:r>
             <a:endParaRPr lang="en-US" dirty="0"/>
           </a:p>
@@ -1752,7 +1930,7 @@
           <a:p>
             <a:r>
               <a:rPr lang="en-US" dirty="0"/>
-              <a:t>Why raw counts: if a cell has one KRT19 or one GLUL molecule, that may be ambient RNA — for this question, absolute molecule detection matters, so SCT-normalized values are the wrong object. We down-thin every nucleus to a common 1,500-UMI budget, call a marker on only at ≥2 UMIs, classify each hepatocyte, and summarize per donor. The key is not that every number is identical — it's that none of the failure modes shows a monotone, large, biopsy-axis collapse. Dual co-expression stays ~0.4%, vs ~2.9% in the confounded explants.</a:t>
+              <a:t>Why we changed the measurement: the legacy approach used a z-scored relative ruler and marker correlations, which are depth-sensitive and conflate mechanisms. We instead count molecules: extract raw RNA-assay counts, down-thin every nucleus to a common 1,500-UMI budget so detection reflects biology not depth, call a marker on only at ≥2 UMIs to suppress ambient, classify each hepatocyte PC/PP/dual/null, and summarize per donor — the donor is the unit of inference, never the cell.</a:t>
             </a:r>
             <a:endParaRPr lang="en-US" dirty="0"/>
           </a:p>
@@ -1840,7 +2018,7 @@
           <a:p>
             <a:r>
               <a:rPr lang="en-US" dirty="0"/>
-              <a:t>Pseudobulk in one sentence: we collapse thousands of nuclei back to one profile per donor, because donors — not cells — are the biological replicates. This scan was not the primary proof of zonation; it's an independent count-based check (zonation genes flat) plus a discovery layer. Of ~21,000 genes only 64 are significant, and they are biliary/ductular markers, not a broad metabolic/stress/detox program. Wording matters: we say no large single-gene program outside the biliary burden — gene-set testing is still owed for weak coordinated pathways.</a:t>
+              <a:t>Two enlarged plots carry the result. Pericentral-anchor fraction is flat/non-monotone across F0–F4 — no depletion. Dual co-expression at the ambient-robust ≥2-UMI cut stays ~0.4% and does not trend — vs ~2.9% in the confounded explants. The other two mechanisms (null turn-off, PP:PC composition) are also flat — shown as callouts here, full four-panel in backup. And the equivalence bound: we exclude a large ~20-percentage-point shift, but cannot exclude subtle drift below ~10 points, because F4 has only 4 donors. Bottom line: donor-level anchor fractions do not support large biopsy-axis de-zonation.</a:t>
             </a:r>
             <a:endParaRPr lang="en-US" dirty="0"/>
           </a:p>
@@ -1928,7 +2106,7 @@
           <a:p>
             <a:r>
               <a:rPr lang="en-US" dirty="0"/>
-              <a:t>Cautious wording: this does not prove every surviving gene is contamination. It says the dominant interpretation of the biliary burden should be compositional unless proven otherwise — the genes are 5–78× more abundant in cholangiocytes, cholangiocytes expand at F4, per-cell co-expression is ~0.4%, and decontX halves the hits and drops SOX4/SOX9. decontX is evidence, not a verdict: it can over- or under-correct. So source attribution is a lead, not a closed verdict.</a:t>
+              <a:t>Pseudobulk in one sentence: we collapse thousands of nuclei to one profile per donor, because donors — not cells — are the biological replicates. This is an independent count-based check (zonation genes flat, GLUL FDR 0.80) plus a discovery layer. Only 64 of ~21,000 genes are significant, and they are biliary/ductular markers, not a broad metabolic/stress program. Careful wording: no large single-GENE program outside the biliary burden — and I flag on the slide that gene-LEVEL FDR can miss a weak coordinated pathway, which needs gene-set testing. I show them I know that limitation.</a:t>
             </a:r>
             <a:endParaRPr lang="en-US" dirty="0"/>
           </a:p>
@@ -2016,7 +2194,7 @@
           <a:p>
             <a:r>
               <a:rPr lang="en-US" dirty="0"/>
-              <a:t>Close on the methodological lesson, aligned with the assignment: the lesson is not only biological. In single-cell disease atlases, acquisition matching can dominate apparent disease trajectories. Our bottom line is narrow and honest: the transcriptomic leg of progressive de-zonation does not survive matched-source re-analysis; imaging/protein/organoid evidence is untouched.</a:t>
+              <a:t>Cautious wording — distinguish evidence levels. STRONG: the genes are 5–78× more abundant in cholangiocytes, and per-cell hepatocyte co-expression is only ~0.4%. SUGGESTIVE: decontX halves the hits and drops SOX4/SOX9 — this supports an ambient contribution but is not proof; decontX can over- or under-correct. OPEN: EPCAM/SPINT2/B3GNT3 survive. So the dominant evidence points to composition/ambient RNA, but a rare intrinsic state is not excluded — say that, do not say 'we proved contamination.' CXCL10 is set aside as a candidate real inflammatory signal.</a:t>
             </a:r>
             <a:endParaRPr lang="en-US" dirty="0"/>
           </a:p>
@@ -2104,7 +2282,7 @@
           <a:p>
             <a:r>
               <a:rPr lang="en-US" dirty="0"/>
-              <a:t/>
+              <a:t>Close on the methodological lesson: in single-cell disease atlases, acquisition matching can dominate apparent disease trajectories. The bottom line is narrow and honest: the snRNA-seq transcriptomic evidence for progressive de-zonation does not survive matched-source re-analysis; imaging/protein/organoid evidence is untouched. And keep the biliary claim careful — most consistent with composition/ambient RNA, a rare intrinsic state not excluded.</a:t>
             </a:r>
             <a:endParaRPr lang="en-US" dirty="0"/>
           </a:p>
@@ -2485,8 +2663,8 @@
         </p:nvSpPr>
         <p:spPr>
           <a:xfrm>
-            <a:off x="640080" y="640080"/>
-            <a:ext cx="10881360" cy="1371600"/>
+            <a:off x="640080" y="548640"/>
+            <a:ext cx="10881360" cy="1463040"/>
           </a:xfrm>
           <a:prstGeom prst="rect">
             <a:avLst/>
@@ -2502,14 +2680,14 @@
               <a:buNone/>
             </a:pPr>
             <a:r>
-              <a:rPr lang="en-US" sz="4000" b="1" dirty="0">
+              <a:rPr lang="en-US" sz="3800" b="1" dirty="0">
                 <a:solidFill>
                   <a:srgbClr val="FFFFFF"/>
                 </a:solidFill>
               </a:rPr>
-              <a:t>Matched biopsies preserve hepatocyte zonation in MASLD</a:t>
-            </a:r>
-            <a:endParaRPr lang="en-US" sz="4000" dirty="0"/>
+              <a:t>Matched biopsies preserve hepatocyte transcriptional zonation in MASLD</a:t>
+            </a:r>
+            <a:endParaRPr lang="en-US" sz="3800" dirty="0"/>
           </a:p>
         </p:txBody>
       </p:sp>
@@ -2521,7 +2699,7 @@
         </p:nvSpPr>
         <p:spPr>
           <a:xfrm>
-            <a:off x="640080" y="1965960"/>
+            <a:off x="640080" y="2011680"/>
             <a:ext cx="10881360" cy="457200"/>
           </a:xfrm>
           <a:prstGeom prst="rect">
@@ -2557,12 +2735,12 @@
         </p:nvSpPr>
         <p:spPr>
           <a:xfrm>
-            <a:off x="640080" y="2834640"/>
-            <a:ext cx="4937760" cy="1371600"/>
+            <a:off x="640080" y="2743200"/>
+            <a:ext cx="5029200" cy="1554480"/>
           </a:xfrm>
           <a:prstGeom prst="roundRect">
             <a:avLst>
-              <a:gd name="adj" fmla="val 6667"/>
+              <a:gd name="adj" fmla="val 5882"/>
             </a:avLst>
           </a:prstGeom>
           <a:solidFill>
@@ -2584,8 +2762,8 @@
         </p:nvSpPr>
         <p:spPr>
           <a:xfrm>
-            <a:off x="822960" y="2971800"/>
-            <a:ext cx="4572000" cy="1097280"/>
+            <a:off x="822960" y="2852928"/>
+            <a:ext cx="4663440" cy="1325880"/>
           </a:xfrm>
           <a:prstGeom prst="rect">
             <a:avLst/>
@@ -2606,19 +2784,19 @@
                   <a:srgbClr val="FCA5A5"/>
                 </a:solidFill>
               </a:rPr>
-              <a:t>Original claim
+              <a:t>Published claim — Gribben et al.
 </a:t>
             </a:r>
             <a:pPr algn="l" indent="0" marL="0">
               <a:buNone/>
             </a:pPr>
             <a:r>
-              <a:rPr lang="en-US" sz="1400" dirty="0">
+              <a:rPr lang="en-US" sz="1350" dirty="0">
                 <a:solidFill>
                   <a:srgbClr val="FECACA"/>
                 </a:solidFill>
               </a:rPr>
-              <a:t>MASLD progression → zonation loss + hepatocyte→cholangiocyte plasticity</a:t>
+              <a:t>“Hepatocytes lose their zonation” as MASLD progresses, and de-zonated hepatocytes transdifferentiate toward cholangiocytes (epithelial plasticity).</a:t>
             </a:r>
             <a:endParaRPr lang="en-US" sz="1600" dirty="0"/>
           </a:p>
@@ -2632,7 +2810,7 @@
         </p:nvSpPr>
         <p:spPr>
           <a:xfrm>
-            <a:off x="5715000" y="3383280"/>
+            <a:off x="5806440" y="3337560"/>
             <a:ext cx="502920" cy="320040"/>
           </a:xfrm>
           <a:prstGeom prst="rtTriangle">
@@ -2652,12 +2830,12 @@
         </p:nvSpPr>
         <p:spPr>
           <a:xfrm>
-            <a:off x="6583680" y="2834640"/>
-            <a:ext cx="4937760" cy="1371600"/>
+            <a:off x="6492240" y="2743200"/>
+            <a:ext cx="5029200" cy="1554480"/>
           </a:xfrm>
           <a:prstGeom prst="roundRect">
             <a:avLst>
-              <a:gd name="adj" fmla="val 6667"/>
+              <a:gd name="adj" fmla="val 5882"/>
             </a:avLst>
           </a:prstGeom>
           <a:solidFill>
@@ -2679,8 +2857,8 @@
         </p:nvSpPr>
         <p:spPr>
           <a:xfrm>
-            <a:off x="6766560" y="2971800"/>
-            <a:ext cx="4572000" cy="1097280"/>
+            <a:off x="6675120" y="2852928"/>
+            <a:ext cx="4663440" cy="1325880"/>
           </a:xfrm>
           <a:prstGeom prst="rect">
             <a:avLst/>
@@ -2701,19 +2879,19 @@
                   <a:srgbClr val="5EEAD4"/>
                 </a:solidFill>
               </a:rPr>
-              <a:t>Our re-analysis (matched biopsies)
+              <a:t>This re-analysis — matched biopsies
 </a:t>
             </a:r>
             <a:pPr algn="l" indent="0" marL="0">
               <a:buNone/>
             </a:pPr>
             <a:r>
-              <a:rPr lang="en-US" sz="1400" dirty="0">
+              <a:rPr lang="en-US" sz="1350" dirty="0">
                 <a:solidFill>
                   <a:srgbClr val="99F6E4"/>
                 </a:solidFill>
               </a:rPr>
-              <a:t>zonation preserved; biliary signal likely compositional</a:t>
+              <a:t>transcriptional zonation preserved; the reported de-zonation tracks tissue-source confounding; the biliary signal is most consistent with composition / ambient RNA.</a:t>
             </a:r>
             <a:endParaRPr lang="en-US" sz="1600" dirty="0"/>
           </a:p>
@@ -2727,7 +2905,7 @@
         </p:nvSpPr>
         <p:spPr>
           <a:xfrm>
-            <a:off x="640080" y="4572000"/>
+            <a:off x="640080" y="4617720"/>
             <a:ext cx="10881360" cy="1554480"/>
           </a:xfrm>
           <a:prstGeom prst="rect">
@@ -2934,7 +3112,7 @@
                   <a:srgbClr val="1E293B"/>
                 </a:solidFill>
               </a:rPr>
-              <a:t>Maybe the caudate lobe caused it? Lobe-invariant</a:t>
+              <a:t>Full four-mechanism panel (all F0–F4)</a:t>
             </a:r>
             <a:endParaRPr lang="en-US" sz="2600" dirty="0"/>
           </a:p>
@@ -2942,7 +3120,7 @@
       </p:sp>
       <p:pic>
         <p:nvPicPr>
-          <p:cNvPr id="4" name="Image 0" descr="D:\CS\Genomics\Hackathon\reports\deck/assets/fig_lobe.png">    </p:cNvPr>
+          <p:cNvPr id="4" name="Image 0" descr="D:\CS\Genomics\Hackathon\reports\deck/assets/fig_anchor2x2.png">    </p:cNvPr>
           <p:cNvPicPr>
             <a:picLocks noChangeAspect="1"/>
           </p:cNvPicPr>
@@ -2955,8 +3133,8 @@
         </p:blipFill>
         <p:spPr>
           <a:xfrm>
-            <a:off x="731520" y="1463040"/>
-            <a:ext cx="6949440" cy="4572000"/>
+            <a:off x="1188720" y="1417320"/>
+            <a:ext cx="8412480" cy="4663440"/>
           </a:xfrm>
           <a:prstGeom prst="rect">
             <a:avLst/>
@@ -2971,8 +3149,8 @@
         </p:nvSpPr>
         <p:spPr>
           <a:xfrm>
-            <a:off x="7955280" y="2377440"/>
-            <a:ext cx="3657600" cy="2286000"/>
+            <a:off x="9692640" y="2377440"/>
+            <a:ext cx="2286000" cy="2743200"/>
           </a:xfrm>
           <a:prstGeom prst="rect">
             <a:avLst/>
@@ -2988,43 +3166,29 @@
               <a:buNone/>
             </a:pPr>
             <a:r>
-              <a:rPr lang="en-US" sz="1800" b="1" dirty="0">
+              <a:rPr lang="en-US" sz="1500" b="1" dirty="0">
                 <a:solidFill>
                   <a:srgbClr val="1E293B"/>
                 </a:solidFill>
               </a:rPr>
-              <a:t>Detection rates match across Right / Caudate / Left.
+              <a:t>None of the four de-zonation routes shows a large monotone biopsy-axis change.
 </a:t>
             </a:r>
-            <a:endParaRPr lang="en-US" sz="1800" dirty="0"/>
+            <a:endParaRPr lang="en-US" sz="1500" dirty="0"/>
           </a:p>
           <a:p>
             <a:pPr algn="l" indent="0" marL="0">
               <a:buNone/>
             </a:pPr>
             <a:r>
-              <a:rPr lang="en-US" sz="1800" dirty="0">
-                <a:solidFill>
-                  <a:srgbClr val="1E293B"/>
-                </a:solidFill>
-              </a:rPr>
-              <a:t>Lobe does not explain the signal;</a:t>
-            </a:r>
-            <a:endParaRPr lang="en-US" sz="1800" dirty="0"/>
-          </a:p>
-          <a:p>
-            <a:pPr algn="l" indent="0" marL="0">
-              <a:buNone/>
-            </a:pPr>
-            <a:r>
-              <a:rPr lang="en-US" sz="1800" dirty="0">
-                <a:solidFill>
-                  <a:srgbClr val="1E293B"/>
-                </a:solidFill>
-              </a:rPr>
-              <a:t>explant-vs-biopsy acquisition still does.</a:t>
-            </a:r>
-            <a:endParaRPr lang="en-US" sz="1800" dirty="0"/>
+              <a:rPr lang="en-US" sz="1500" dirty="0">
+                <a:solidFill>
+                  <a:srgbClr val="BE123C"/>
+                </a:solidFill>
+              </a:rPr>
+              <a:t>Confounded explants for contrast: dual ≈ 2.9% (~7×).</a:t>
+            </a:r>
+            <a:endParaRPr lang="en-US" sz="1500" dirty="0"/>
           </a:p>
         </p:txBody>
       </p:sp>
@@ -3126,83 +3290,103 @@
                   <a:srgbClr val="1E293B"/>
                 </a:solidFill>
               </a:rPr>
-              <a:t>What happens in end-stage? Five organs, five phenotypes</a:t>
+              <a:t>Are you overturning the paper? No — narrow scope</a:t>
             </a:r>
             <a:endParaRPr lang="en-US" sz="2600" dirty="0"/>
           </a:p>
         </p:txBody>
       </p:sp>
-      <p:pic>
-        <p:nvPicPr>
-          <p:cNvPr id="4" name="Image 0" descr="D:\CS\Genomics\Hackathon\reports\deck/assets/fig_explant.png">    </p:cNvPr>
-          <p:cNvPicPr>
-            <a:picLocks noChangeAspect="1"/>
-          </p:cNvPicPr>
-          <p:nvPr/>
-        </p:nvPicPr>
-        <p:blipFill>
-          <a:blip r:embed="rId1"/>
-          <a:srcRect l="0" r="0" t="0" b="0"/>
-          <a:stretch/>
-        </p:blipFill>
-        <p:spPr>
-          <a:xfrm>
-            <a:off x="731520" y="1463040"/>
-            <a:ext cx="7498080" cy="4572000"/>
-          </a:xfrm>
-          <a:prstGeom prst="rect">
-            <a:avLst/>
-          </a:prstGeom>
-        </p:spPr>
-      </p:pic>
-      <p:sp>
-        <p:nvSpPr>
-          <p:cNvPr id="5" name="Text 2"/>
-          <p:cNvSpPr/>
-          <p:nvPr/>
-        </p:nvSpPr>
-        <p:spPr>
-          <a:xfrm>
-            <a:off x="8412480" y="2377440"/>
-            <a:ext cx="3291840" cy="2377440"/>
-          </a:xfrm>
-          <a:prstGeom prst="rect">
-            <a:avLst/>
-          </a:prstGeom>
-          <a:noFill/>
-          <a:ln/>
-        </p:spPr>
-        <p:txBody>
-          <a:bodyPr wrap="square" rtlCol="0" anchor="ctr"/>
-          <a:lstStyle/>
-          <a:p>
-            <a:pPr algn="l" indent="0" marL="0">
-              <a:buNone/>
-            </a:pPr>
-            <a:r>
-              <a:rPr lang="en-US" sz="1700" b="1" dirty="0">
+      <p:sp>
+        <p:nvSpPr>
+          <p:cNvPr id="4" name="Text 2"/>
+          <p:cNvSpPr/>
+          <p:nvPr/>
+        </p:nvSpPr>
+        <p:spPr>
+          <a:xfrm>
+            <a:off x="731520" y="1554480"/>
+            <a:ext cx="10607040" cy="4572000"/>
+          </a:xfrm>
+          <a:prstGeom prst="rect">
+            <a:avLst/>
+          </a:prstGeom>
+          <a:noFill/>
+          <a:ln/>
+        </p:spPr>
+        <p:txBody>
+          <a:bodyPr wrap="square" rtlCol="0" anchor="t"/>
+          <a:lstStyle/>
+          <a:p>
+            <a:pPr algn="l" marL="342900" indent="-342900">
+              <a:spcAft>
+                <a:spcPts val="900"/>
+              </a:spcAft>
+              <a:buSzPct val="100000"/>
+              <a:buChar char="•"/>
+            </a:pPr>
+            <a:r>
+              <a:rPr lang="en-US" sz="2000" dirty="0">
                 <a:solidFill>
                   <a:srgbClr val="1E293B"/>
                 </a:solidFill>
               </a:rPr>
-              <a:t>PC-anchor 3% → 50%;  PP:PC 0.13 → 20.
-</a:t>
-            </a:r>
-            <a:endParaRPr lang="en-US" sz="1700" dirty="0"/>
-          </a:p>
-          <a:p>
-            <a:pPr algn="l" indent="0" marL="0">
-              <a:buNone/>
-            </a:pPr>
-            <a:r>
-              <a:rPr lang="en-US" sz="1700" dirty="0">
+              <a:t>We re-tested only the snRNA-seq transcriptional zonation/plasticity evidence.</a:t>
+            </a:r>
+            <a:endParaRPr lang="en-US" sz="2000" dirty="0"/>
+          </a:p>
+          <a:p>
+            <a:pPr algn="l" marL="342900" indent="-342900">
+              <a:spcAft>
+                <a:spcPts val="900"/>
+              </a:spcAft>
+              <a:buSzPct val="100000"/>
+              <a:buChar char="•"/>
+            </a:pPr>
+            <a:r>
+              <a:rPr lang="en-US" sz="2000" dirty="0">
                 <a:solidFill>
                   <a:srgbClr val="1E293B"/>
                 </a:solidFill>
               </a:rPr>
-              <a:t>Dramatic but NOT one coherent program — pooling them manufactures a uniform “collapse.”</a:t>
-            </a:r>
-            <a:endParaRPr lang="en-US" sz="1700" dirty="0"/>
+              <a:t>We did NOT test imaging, protein staining, organoids, or 3D architecture.</a:t>
+            </a:r>
+            <a:endParaRPr lang="en-US" sz="2000" dirty="0"/>
+          </a:p>
+          <a:p>
+            <a:pPr algn="l" marL="342900" indent="-342900">
+              <a:spcAft>
+                <a:spcPts val="900"/>
+              </a:spcAft>
+              <a:buSzPct val="100000"/>
+              <a:buChar char="•"/>
+            </a:pPr>
+            <a:r>
+              <a:rPr lang="en-US" sz="2000" dirty="0">
+                <a:solidFill>
+                  <a:srgbClr val="1E293B"/>
+                </a:solidFill>
+              </a:rPr>
+              <a:t>Claim: matched biopsy transcriptomes do not show progressive zonation loss.</a:t>
+            </a:r>
+            <a:endParaRPr lang="en-US" sz="2000" dirty="0"/>
+          </a:p>
+          <a:p>
+            <a:pPr algn="l" marL="342900" indent="-342900">
+              <a:spcAft>
+                <a:spcPts val="900"/>
+              </a:spcAft>
+              <a:buSzPct val="100000"/>
+              <a:buChar char="•"/>
+            </a:pPr>
+            <a:r>
+              <a:rPr lang="en-US" sz="2000" dirty="0">
+                <a:solidFill>
+                  <a:srgbClr val="1E293B"/>
+                </a:solidFill>
+              </a:rPr>
+              <a:t>We agree the strong signal is an end-stage phenomenon.</a:t>
+            </a:r>
+            <a:endParaRPr lang="en-US" sz="2000" dirty="0"/>
           </a:p>
         </p:txBody>
       </p:sp>
@@ -3304,103 +3488,97 @@
                   <a:srgbClr val="1E293B"/>
                 </a:solidFill>
               </a:rPr>
-              <a:t>Why raw counts, not SCT?</a:t>
+              <a:t>Maybe the caudate lobe caused it? Lobe-invariant</a:t>
             </a:r>
             <a:endParaRPr lang="en-US" sz="2600" dirty="0"/>
           </a:p>
         </p:txBody>
       </p:sp>
-      <p:sp>
-        <p:nvSpPr>
-          <p:cNvPr id="4" name="Text 2"/>
-          <p:cNvSpPr/>
-          <p:nvPr/>
-        </p:nvSpPr>
-        <p:spPr>
-          <a:xfrm>
-            <a:off x="731520" y="1554480"/>
-            <a:ext cx="10607040" cy="4572000"/>
-          </a:xfrm>
-          <a:prstGeom prst="rect">
-            <a:avLst/>
-          </a:prstGeom>
-          <a:noFill/>
-          <a:ln/>
-        </p:spPr>
-        <p:txBody>
-          <a:bodyPr wrap="square" rtlCol="0" anchor="t"/>
-          <a:lstStyle/>
-          <a:p>
-            <a:pPr algn="l" marL="342900" indent="-342900">
-              <a:spcAft>
-                <a:spcPts val="900"/>
-              </a:spcAft>
-              <a:buSzPct val="100000"/>
-              <a:buChar char="•"/>
-            </a:pPr>
-            <a:r>
-              <a:rPr lang="en-US" sz="2000" dirty="0">
+      <p:pic>
+        <p:nvPicPr>
+          <p:cNvPr id="4" name="Image 0" descr="D:\CS\Genomics\Hackathon\reports\deck/assets/fig_lobe.png">    </p:cNvPr>
+          <p:cNvPicPr>
+            <a:picLocks noChangeAspect="1"/>
+          </p:cNvPicPr>
+          <p:nvPr/>
+        </p:nvPicPr>
+        <p:blipFill>
+          <a:blip r:embed="rId1"/>
+          <a:srcRect l="0" r="0" t="0" b="0"/>
+          <a:stretch/>
+        </p:blipFill>
+        <p:spPr>
+          <a:xfrm>
+            <a:off x="731520" y="1463040"/>
+            <a:ext cx="6949440" cy="4572000"/>
+          </a:xfrm>
+          <a:prstGeom prst="rect">
+            <a:avLst/>
+          </a:prstGeom>
+        </p:spPr>
+      </p:pic>
+      <p:sp>
+        <p:nvSpPr>
+          <p:cNvPr id="5" name="Text 2"/>
+          <p:cNvSpPr/>
+          <p:nvPr/>
+        </p:nvSpPr>
+        <p:spPr>
+          <a:xfrm>
+            <a:off x="7955280" y="2377440"/>
+            <a:ext cx="3657600" cy="2286000"/>
+          </a:xfrm>
+          <a:prstGeom prst="rect">
+            <a:avLst/>
+          </a:prstGeom>
+          <a:noFill/>
+          <a:ln/>
+        </p:spPr>
+        <p:txBody>
+          <a:bodyPr wrap="square" rtlCol="0" anchor="ctr"/>
+          <a:lstStyle/>
+          <a:p>
+            <a:pPr algn="l" indent="0" marL="0">
+              <a:buNone/>
+            </a:pPr>
+            <a:r>
+              <a:rPr lang="en-US" sz="1800" b="1" dirty="0">
                 <a:solidFill>
                   <a:srgbClr val="1E293B"/>
                 </a:solidFill>
               </a:rPr>
-              <a:t>SCT is great for clustering / visualization.</a:t>
-            </a:r>
-            <a:endParaRPr lang="en-US" sz="2000" dirty="0"/>
-          </a:p>
-          <a:p>
-            <a:pPr algn="l" marL="342900" indent="-342900">
-              <a:spcAft>
-                <a:spcPts val="900"/>
-              </a:spcAft>
-              <a:buSzPct val="100000"/>
-              <a:buChar char="•"/>
-            </a:pPr>
-            <a:r>
-              <a:rPr lang="en-US" sz="2000" dirty="0">
+              <a:t>Detection rates match across Right / Caudate / Left.
+</a:t>
+            </a:r>
+            <a:endParaRPr lang="en-US" sz="1800" dirty="0"/>
+          </a:p>
+          <a:p>
+            <a:pPr algn="l" indent="0" marL="0">
+              <a:buNone/>
+            </a:pPr>
+            <a:r>
+              <a:rPr lang="en-US" sz="1800" dirty="0">
                 <a:solidFill>
                   <a:srgbClr val="1E293B"/>
                 </a:solidFill>
               </a:rPr>
-              <a:t>But this question depends on molecule detection and ambient RNA.</a:t>
-            </a:r>
-            <a:endParaRPr lang="en-US" sz="2000" dirty="0"/>
-          </a:p>
-          <a:p>
-            <a:pPr algn="l" marL="342900" indent="-342900">
-              <a:spcAft>
-                <a:spcPts val="900"/>
-              </a:spcAft>
-              <a:buSzPct val="100000"/>
-              <a:buChar char="•"/>
-            </a:pPr>
-            <a:r>
-              <a:rPr lang="en-US" sz="2000" dirty="0">
+              <a:t>Lobe does not explain the signal;</a:t>
+            </a:r>
+            <a:endParaRPr lang="en-US" sz="1800" dirty="0"/>
+          </a:p>
+          <a:p>
+            <a:pPr algn="l" indent="0" marL="0">
+              <a:buNone/>
+            </a:pPr>
+            <a:r>
+              <a:rPr lang="en-US" sz="1800" dirty="0">
                 <a:solidFill>
                   <a:srgbClr val="1E293B"/>
                 </a:solidFill>
               </a:rPr>
-              <a:t>Raw counts + equal 1,500-UMI budget + ≥2-UMI threshold directly test marker co-detection.</a:t>
-            </a:r>
-            <a:endParaRPr lang="en-US" sz="2000" dirty="0"/>
-          </a:p>
-          <a:p>
-            <a:pPr algn="l" marL="342900" indent="-342900">
-              <a:spcAft>
-                <a:spcPts val="900"/>
-              </a:spcAft>
-              <a:buSzPct val="100000"/>
-              <a:buChar char="•"/>
-            </a:pPr>
-            <a:r>
-              <a:rPr lang="en-US" sz="2000" dirty="0">
-                <a:solidFill>
-                  <a:srgbClr val="1E293B"/>
-                </a:solidFill>
-              </a:rPr>
-              <a:t>A single-UMI event can easily be ambient; ≥2 is more robust (not proof).</a:t>
-            </a:r>
-            <a:endParaRPr lang="en-US" sz="2000" dirty="0"/>
+              <a:t>explant-vs-biopsy acquisition still does.</a:t>
+            </a:r>
+            <a:endParaRPr lang="en-US" sz="1800" dirty="0"/>
           </a:p>
         </p:txBody>
       </p:sp>
@@ -3502,103 +3680,83 @@
                   <a:srgbClr val="1E293B"/>
                 </a:solidFill>
               </a:rPr>
-              <a:t>Why pseudobulk, not per-cell DGE?</a:t>
+              <a:t>What happens in end-stage? Five organs, five phenotypes</a:t>
             </a:r>
             <a:endParaRPr lang="en-US" sz="2600" dirty="0"/>
           </a:p>
         </p:txBody>
       </p:sp>
-      <p:sp>
-        <p:nvSpPr>
-          <p:cNvPr id="4" name="Text 2"/>
-          <p:cNvSpPr/>
-          <p:nvPr/>
-        </p:nvSpPr>
-        <p:spPr>
-          <a:xfrm>
-            <a:off x="731520" y="1554480"/>
-            <a:ext cx="10607040" cy="4572000"/>
-          </a:xfrm>
-          <a:prstGeom prst="rect">
-            <a:avLst/>
-          </a:prstGeom>
-          <a:noFill/>
-          <a:ln/>
-        </p:spPr>
-        <p:txBody>
-          <a:bodyPr wrap="square" rtlCol="0" anchor="t"/>
-          <a:lstStyle/>
-          <a:p>
-            <a:pPr algn="l" marL="342900" indent="-342900">
-              <a:spcAft>
-                <a:spcPts val="900"/>
-              </a:spcAft>
-              <a:buSzPct val="100000"/>
-              <a:buChar char="•"/>
-            </a:pPr>
-            <a:r>
-              <a:rPr lang="en-US" sz="2000" dirty="0">
+      <p:pic>
+        <p:nvPicPr>
+          <p:cNvPr id="4" name="Image 0" descr="D:\CS\Genomics\Hackathon\reports\deck/assets/fig_explant.png">    </p:cNvPr>
+          <p:cNvPicPr>
+            <a:picLocks noChangeAspect="1"/>
+          </p:cNvPicPr>
+          <p:nvPr/>
+        </p:nvPicPr>
+        <p:blipFill>
+          <a:blip r:embed="rId1"/>
+          <a:srcRect l="0" r="0" t="0" b="0"/>
+          <a:stretch/>
+        </p:blipFill>
+        <p:spPr>
+          <a:xfrm>
+            <a:off x="731520" y="1463040"/>
+            <a:ext cx="7498080" cy="4572000"/>
+          </a:xfrm>
+          <a:prstGeom prst="rect">
+            <a:avLst/>
+          </a:prstGeom>
+        </p:spPr>
+      </p:pic>
+      <p:sp>
+        <p:nvSpPr>
+          <p:cNvPr id="5" name="Text 2"/>
+          <p:cNvSpPr/>
+          <p:nvPr/>
+        </p:nvSpPr>
+        <p:spPr>
+          <a:xfrm>
+            <a:off x="8412480" y="2377440"/>
+            <a:ext cx="3291840" cy="2377440"/>
+          </a:xfrm>
+          <a:prstGeom prst="rect">
+            <a:avLst/>
+          </a:prstGeom>
+          <a:noFill/>
+          <a:ln/>
+        </p:spPr>
+        <p:txBody>
+          <a:bodyPr wrap="square" rtlCol="0" anchor="ctr"/>
+          <a:lstStyle/>
+          <a:p>
+            <a:pPr algn="l" indent="0" marL="0">
+              <a:buNone/>
+            </a:pPr>
+            <a:r>
+              <a:rPr lang="en-US" sz="1700" b="1" dirty="0">
                 <a:solidFill>
                   <a:srgbClr val="1E293B"/>
                 </a:solidFill>
               </a:rPr>
-              <a:t>Cells from the same donor are not independent replicates (pseudoreplication).</a:t>
-            </a:r>
-            <a:endParaRPr lang="en-US" sz="2000" dirty="0"/>
-          </a:p>
-          <a:p>
-            <a:pPr algn="l" marL="342900" indent="-342900">
-              <a:spcAft>
-                <a:spcPts val="900"/>
-              </a:spcAft>
-              <a:buSzPct val="100000"/>
-              <a:buChar char="•"/>
-            </a:pPr>
-            <a:r>
-              <a:rPr lang="en-US" sz="2000" dirty="0">
+              <a:t>PC-anchor 3% → 50%;  PP:PC 0.13 → 20.
+</a:t>
+            </a:r>
+            <a:endParaRPr lang="en-US" sz="1700" dirty="0"/>
+          </a:p>
+          <a:p>
+            <a:pPr algn="l" indent="0" marL="0">
+              <a:buNone/>
+            </a:pPr>
+            <a:r>
+              <a:rPr lang="en-US" sz="1700" dirty="0">
                 <a:solidFill>
                   <a:srgbClr val="1E293B"/>
                 </a:solidFill>
               </a:rPr>
-              <a:t>Pseudobulk sums raw counts per donor → one profile per donor.</a:t>
-            </a:r>
-            <a:endParaRPr lang="en-US" sz="2000" dirty="0"/>
-          </a:p>
-          <a:p>
-            <a:pPr algn="l" marL="342900" indent="-342900">
-              <a:spcAft>
-                <a:spcPts val="900"/>
-              </a:spcAft>
-              <a:buSzPct val="100000"/>
-              <a:buChar char="•"/>
-            </a:pPr>
-            <a:r>
-              <a:rPr lang="en-US" sz="2000" dirty="0">
-                <a:solidFill>
-                  <a:srgbClr val="1E293B"/>
-                </a:solidFill>
-              </a:rPr>
-              <a:t>DGE then tests donor-level consistency (Squair et al. 2021).</a:t>
-            </a:r>
-            <a:endParaRPr lang="en-US" sz="2000" dirty="0"/>
-          </a:p>
-          <a:p>
-            <a:pPr algn="l" marL="342900" indent="-342900">
-              <a:spcAft>
-                <a:spcPts val="900"/>
-              </a:spcAft>
-              <a:buSzPct val="100000"/>
-              <a:buChar char="•"/>
-            </a:pPr>
-            <a:r>
-              <a:rPr lang="en-US" sz="2000" dirty="0">
-                <a:solidFill>
-                  <a:srgbClr val="1E293B"/>
-                </a:solidFill>
-              </a:rPr>
-              <a:t>38 biopsy donors; F4 = 4 donors → F4-specific signals treated with caution.</a:t>
-            </a:r>
-            <a:endParaRPr lang="en-US" sz="2000" dirty="0"/>
+              <a:t>Dramatic but NOT one coherent program — pooling them manufactures a uniform “collapse.”</a:t>
+            </a:r>
+            <a:endParaRPr lang="en-US" sz="1700" dirty="0"/>
           </a:p>
         </p:txBody>
       </p:sp>
@@ -3700,22 +3858,45 @@
                   <a:srgbClr val="1E293B"/>
                 </a:solidFill>
               </a:rPr>
-              <a:t>Why abandon the relative correlation/spread ruler?</a:t>
+              <a:t>Robustness: sensitivity grid + equivalence bound</a:t>
             </a:r>
             <a:endParaRPr lang="en-US" sz="2600" dirty="0"/>
           </a:p>
         </p:txBody>
       </p:sp>
-      <p:sp>
-        <p:nvSpPr>
-          <p:cNvPr id="4" name="Text 2"/>
-          <p:cNvSpPr/>
-          <p:nvPr/>
-        </p:nvSpPr>
-        <p:spPr>
-          <a:xfrm>
-            <a:off x="731520" y="1554480"/>
-            <a:ext cx="10607040" cy="4572000"/>
+      <p:pic>
+        <p:nvPicPr>
+          <p:cNvPr id="4" name="Image 0" descr="D:\CS\Genomics\Hackathon\reports\deck/assets/fig_tost.png">    </p:cNvPr>
+          <p:cNvPicPr>
+            <a:picLocks noChangeAspect="1"/>
+          </p:cNvPicPr>
+          <p:nvPr/>
+        </p:nvPicPr>
+        <p:blipFill>
+          <a:blip r:embed="rId1"/>
+          <a:srcRect l="0" r="0" t="0" b="0"/>
+          <a:stretch/>
+        </p:blipFill>
+        <p:spPr>
+          <a:xfrm>
+            <a:off x="6035040" y="1554480"/>
+            <a:ext cx="5852160" cy="3657600"/>
+          </a:xfrm>
+          <a:prstGeom prst="rect">
+            <a:avLst/>
+          </a:prstGeom>
+        </p:spPr>
+      </p:pic>
+      <p:sp>
+        <p:nvSpPr>
+          <p:cNvPr id="5" name="Text 2"/>
+          <p:cNvSpPr/>
+          <p:nvPr/>
+        </p:nvSpPr>
+        <p:spPr>
+          <a:xfrm>
+            <a:off x="640080" y="1737360"/>
+            <a:ext cx="5212080" cy="3840480"/>
           </a:xfrm>
           <a:prstGeom prst="rect">
             <a:avLst/>
@@ -3727,76 +3908,64 @@
           <a:bodyPr wrap="square" rtlCol="0" anchor="t"/>
           <a:lstStyle/>
           <a:p>
-            <a:pPr algn="l" marL="342900" indent="-342900">
-              <a:spcAft>
-                <a:spcPts val="900"/>
-              </a:spcAft>
-              <a:buSzPct val="100000"/>
-              <a:buChar char="•"/>
-            </a:pPr>
-            <a:r>
-              <a:rPr lang="en-US" sz="2000" dirty="0">
+            <a:pPr algn="l" indent="0" marL="0">
+              <a:buNone/>
+            </a:pPr>
+            <a:r>
+              <a:rPr lang="en-US" sz="1600" b="1" dirty="0">
                 <a:solidFill>
                   <a:srgbClr val="1E293B"/>
                 </a:solidFill>
               </a:rPr>
-              <a:t>It was source-confounded (the collapse lived in the confounded endpoints).</a:t>
-            </a:r>
-            <a:endParaRPr lang="en-US" sz="2000" dirty="0"/>
-          </a:p>
-          <a:p>
-            <a:pPr algn="l" marL="342900" indent="-342900">
-              <a:spcAft>
-                <a:spcPts val="900"/>
-              </a:spcAft>
-              <a:buSzPct val="100000"/>
-              <a:buChar char="•"/>
-            </a:pPr>
-            <a:r>
-              <a:rPr lang="en-US" sz="2000" dirty="0">
+              <a:t>Stable across every variant:
+</a:t>
+            </a:r>
+            <a:endParaRPr lang="en-US" sz="1600" dirty="0"/>
+          </a:p>
+          <a:p>
+            <a:pPr algn="l" indent="0" marL="0">
+              <a:buNone/>
+            </a:pPr>
+            <a:r>
+              <a:rPr lang="en-US" sz="1600" dirty="0">
                 <a:solidFill>
                   <a:srgbClr val="1E293B"/>
                 </a:solidFill>
               </a:rPr>
-              <a:t>It was depth-sensitive (shallower F4 changes spread for non-biological reasons).</a:t>
-            </a:r>
-            <a:endParaRPr lang="en-US" sz="2000" dirty="0"/>
-          </a:p>
-          <a:p>
-            <a:pPr algn="l" marL="342900" indent="-342900">
-              <a:spcAft>
-                <a:spcPts val="900"/>
-              </a:spcAft>
-              <a:buSzPct val="100000"/>
-              <a:buChar char="•"/>
-            </a:pPr>
-            <a:r>
-              <a:rPr lang="en-US" sz="2000" dirty="0">
-                <a:solidFill>
-                  <a:srgbClr val="1E293B"/>
-                </a:solidFill>
-              </a:rPr>
-              <a:t>It conflated co-expression, turn-off, noise, and composition shift.</a:t>
-            </a:r>
-            <a:endParaRPr lang="en-US" sz="2000" dirty="0"/>
-          </a:p>
-          <a:p>
-            <a:pPr algn="l" marL="342900" indent="-342900">
-              <a:spcAft>
-                <a:spcPts val="900"/>
-              </a:spcAft>
-              <a:buSzPct val="100000"/>
-              <a:buChar char="•"/>
-            </a:pPr>
-            <a:r>
-              <a:rPr lang="en-US" sz="2000" dirty="0">
-                <a:solidFill>
-                  <a:srgbClr val="1E293B"/>
-                </a:solidFill>
-              </a:rPr>
-              <a:t>The count taxonomy separates these mechanisms; a Simpson/aggregation reversal confirmed the artifact.</a:t>
-            </a:r>
-            <a:endParaRPr lang="en-US" sz="2000" dirty="0"/>
+              <a:t>PC = GLUL-only / CYP3A4-only / both;  PP = 2-of-4 / 3-of-4;
+ALDOB in/out;  CPS1-based;  threshold 1 vs 2 UMI.
+</a:t>
+            </a:r>
+            <a:endParaRPr lang="en-US" sz="1600" dirty="0"/>
+          </a:p>
+          <a:p>
+            <a:pPr algn="l" indent="0" marL="0">
+              <a:buNone/>
+            </a:pPr>
+            <a:r>
+              <a:rPr lang="en-US" sz="1600" b="1" dirty="0">
+                <a:solidFill>
+                  <a:srgbClr val="0D9488"/>
+                </a:solidFill>
+              </a:rPr>
+              <a:t>No PC depletion · no dual increase · no turn-off — in all.
+</a:t>
+            </a:r>
+            <a:endParaRPr lang="en-US" sz="1600" dirty="0"/>
+          </a:p>
+          <a:p>
+            <a:pPr algn="l" indent="0" marL="0">
+              <a:buNone/>
+            </a:pPr>
+            <a:r>
+              <a:rPr lang="en-US" sz="1600" i="1" dirty="0">
+                <a:solidFill>
+                  <a:srgbClr val="64748B"/>
+                </a:solidFill>
+              </a:rPr>
+              <a:t>Bound: large shift (~20 pp) excluded; subtle drift ≤10 pp not excluded (F4 n=4).</a:t>
+            </a:r>
+            <a:endParaRPr lang="en-US" sz="1600" dirty="0"/>
           </a:p>
         </p:txBody>
       </p:sp>
@@ -3898,7 +4067,7 @@
                   <a:srgbClr val="1E293B"/>
                 </a:solidFill>
               </a:rPr>
-              <a:t>Why not the 2D PC-vs-PP joint-count plot?</a:t>
+              <a:t>Why raw counts, not SCT?</a:t>
             </a:r>
             <a:endParaRPr lang="en-US" sz="2600" dirty="0"/>
           </a:p>
@@ -3938,7 +4107,7 @@
                   <a:srgbClr val="1E293B"/>
                 </a:solidFill>
               </a:rPr>
-              <a:t>Broad metabolic program sums are ON in most normal hepatocytes.</a:t>
+              <a:t>SCT is great for clustering / visualization.</a:t>
             </a:r>
             <a:endParaRPr lang="en-US" sz="2000" dirty="0"/>
           </a:p>
@@ -3956,7 +4125,7 @@
                   <a:srgbClr val="1E293B"/>
                 </a:solidFill>
               </a:rPr>
-              <a:t>So “both programs high” is satisfied by normal cells — not a co-expression test.</a:t>
+              <a:t>But this question depends on molecule detection and ambient RNA.</a:t>
             </a:r>
             <a:endParaRPr lang="en-US" sz="2000" dirty="0"/>
           </a:p>
@@ -3974,7 +4143,7 @@
                   <a:srgbClr val="1E293B"/>
                 </a:solidFill>
               </a:rPr>
-              <a:t>It is a pole-collapse visual (fuller in biopsy than explant).</a:t>
+              <a:t>Raw counts + equal 1,500-UMI budget + ≥2-UMI threshold directly test marker co-detection.</a:t>
             </a:r>
             <a:endParaRPr lang="en-US" sz="2000" dirty="0"/>
           </a:p>
@@ -3992,7 +4161,7 @@
                   <a:srgbClr val="1E293B"/>
                 </a:solidFill>
               </a:rPr>
-              <a:t>The clean metric is strict anchor dual at ≥2 UMI: ~0.4% biopsy vs ~2.9% explant.</a:t>
+              <a:t>A single-UMI event can easily be ambient; ≥2 is more robust (not proof).</a:t>
             </a:r>
             <a:endParaRPr lang="en-US" sz="2000" dirty="0"/>
           </a:p>
@@ -4096,7 +4265,7 @@
                   <a:srgbClr val="1E293B"/>
                 </a:solidFill>
               </a:rPr>
-              <a:t>DGE model details</a:t>
+              <a:t>Why pseudobulk, not per-cell DGE?</a:t>
             </a:r>
             <a:endParaRPr lang="en-US" sz="2600" dirty="0"/>
           </a:p>
@@ -4136,7 +4305,7 @@
                   <a:srgbClr val="1E293B"/>
                 </a:solidFill>
               </a:rPr>
-              <a:t>Raw hepatocyte UMI counts summed per donor.</a:t>
+              <a:t>Cells from the same donor are not independent replicates (pseudoreplication).</a:t>
             </a:r>
             <a:endParaRPr lang="en-US" sz="2000" dirty="0"/>
           </a:p>
@@ -4154,7 +4323,7 @@
                   <a:srgbClr val="1E293B"/>
                 </a:solidFill>
               </a:rPr>
-              <a:t>filterByExpr retained 21,022 genes; TMM normalization.</a:t>
+              <a:t>Pseudobulk sums raw counts per donor → one profile per donor.</a:t>
             </a:r>
             <a:endParaRPr lang="en-US" sz="2000" dirty="0"/>
           </a:p>
@@ -4172,7 +4341,7 @@
                   <a:srgbClr val="1E293B"/>
                 </a:solidFill>
               </a:rPr>
-              <a:t>edgeR negative-binomial quasi-likelihood GLM, robust dispersion; common BCV 0.405.</a:t>
+              <a:t>DGE then tests donor-level consistency (Squair et al. 2021).</a:t>
             </a:r>
             <a:endParaRPr lang="en-US" sz="2000" dirty="0"/>
           </a:p>
@@ -4190,7 +4359,7 @@
                   <a:srgbClr val="1E293B"/>
                 </a:solidFill>
               </a:rPr>
-              <a:t>Primary contrast F4 vs F1; hits survive a run-covariate and a single-run sensitivity test.</a:t>
+              <a:t>38 biopsy donors; F4 = 4 donors → F4-specific signals treated with caution.</a:t>
             </a:r>
             <a:endParaRPr lang="en-US" sz="2000" dirty="0"/>
           </a:p>
@@ -4294,7 +4463,7 @@
                   <a:srgbClr val="1E293B"/>
                 </a:solidFill>
               </a:rPr>
-              <a:t>Does decontX prove contamination? No</a:t>
+              <a:t>Why abandon the relative correlation/spread ruler?</a:t>
             </a:r>
             <a:endParaRPr lang="en-US" sz="2600" dirty="0"/>
           </a:p>
@@ -4334,7 +4503,7 @@
                   <a:srgbClr val="1E293B"/>
                 </a:solidFill>
               </a:rPr>
-              <a:t>decontX models a native + ambient RNA mixture and subtracts the estimate.</a:t>
+              <a:t>It was source-confounded (the collapse lived in the confounded endpoints).</a:t>
             </a:r>
             <a:endParaRPr lang="en-US" sz="2000" dirty="0"/>
           </a:p>
@@ -4352,7 +4521,7 @@
                   <a:srgbClr val="1E293B"/>
                 </a:solidFill>
               </a:rPr>
-              <a:t>Hits 64 → 34; SOX4/SOX9 drop below significance → supports an ambient contribution.</a:t>
+              <a:t>It was depth-sensitive (shallower F4 changes spread for non-biological reasons).</a:t>
             </a:r>
             <a:endParaRPr lang="en-US" sz="2000" dirty="0"/>
           </a:p>
@@ -4370,7 +4539,7 @@
                   <a:srgbClr val="1E293B"/>
                 </a:solidFill>
               </a:rPr>
-              <a:t>But it can remove true hybrid signal OR leave residual contamination.</a:t>
+              <a:t>It conflated co-expression, turn-off, noise, and composition shift.</a:t>
             </a:r>
             <a:endParaRPr lang="en-US" sz="2000" dirty="0"/>
           </a:p>
@@ -4388,7 +4557,7 @@
                   <a:srgbClr val="1E293B"/>
                 </a:solidFill>
               </a:rPr>
-              <a:t>Therefore source attribution is a lead, not a closed verdict.</a:t>
+              <a:t>A Simpson/aggregation sign-reversal confirmed the artifact; count taxonomy separates mechanisms.</a:t>
             </a:r>
             <a:endParaRPr lang="en-US" sz="2000" dirty="0"/>
           </a:p>
@@ -4492,7 +4661,7 @@
                   <a:srgbClr val="1E293B"/>
                 </a:solidFill>
               </a:rPr>
-              <a:t>The one analysis still owed: gene-set testing</a:t>
+              <a:t>Why not the 2D PC-vs-PP joint-count plot?</a:t>
             </a:r>
             <a:endParaRPr lang="en-US" sz="2600" dirty="0"/>
           </a:p>
@@ -4532,7 +4701,7 @@
                   <a:srgbClr val="1E293B"/>
                 </a:solidFill>
               </a:rPr>
-              <a:t>Gene-level FDR can miss a coordinated WEAK program (many genes, small shifts).</a:t>
+              <a:t>Broad metabolic program sums are ON in most normal hepatocytes.</a:t>
             </a:r>
             <a:endParaRPr lang="en-US" sz="2000" dirty="0"/>
           </a:p>
@@ -4550,7 +4719,7 @@
                   <a:srgbClr val="1E293B"/>
                 </a:solidFill>
               </a:rPr>
-              <a:t>CAMERA + ROAST on pre-specified sets: PC, PP, detox, urea cycle, bile-acid/lipid,</a:t>
+              <a:t>So “both programs high” is satisfied by normal cells — not a co-expression test.</a:t>
             </a:r>
             <a:endParaRPr lang="en-US" sz="2000" dirty="0"/>
           </a:p>
@@ -4568,7 +4737,7 @@
                   <a:srgbClr val="1E293B"/>
                 </a:solidFill>
               </a:rPr>
-              <a:t>mitochondrial, ER stress, interferon, hypoxia, EMT/fetal/progenitor, cholangiocyte/ductular.</a:t>
+              <a:t>It is a pole-collapse visual (fuller in biopsy than explant).</a:t>
             </a:r>
             <a:endParaRPr lang="en-US" sz="2000" dirty="0"/>
           </a:p>
@@ -4586,7 +4755,7 @@
                   <a:srgbClr val="1E293B"/>
                 </a:solidFill>
               </a:rPr>
-              <a:t>Closes the caveat behind “no other large hepatocyte program.”</a:t>
+              <a:t>The clean metric is strict anchor dual at ≥2 UMI: ~0.4% biopsy vs ~2.9% explant.</a:t>
             </a:r>
             <a:endParaRPr lang="en-US" sz="2000" dirty="0"/>
           </a:p>
@@ -4690,45 +4859,22 @@
                   <a:srgbClr val="1E293B"/>
                 </a:solidFill>
               </a:rPr>
-              <a:t>Robustness: sensitivity grid + equivalence bound</a:t>
+              <a:t>DGE model details</a:t>
             </a:r>
             <a:endParaRPr lang="en-US" sz="2600" dirty="0"/>
           </a:p>
         </p:txBody>
       </p:sp>
-      <p:pic>
-        <p:nvPicPr>
-          <p:cNvPr id="4" name="Image 0" descr="D:\CS\Genomics\Hackathon\reports\deck/assets/fig_tost.png">    </p:cNvPr>
-          <p:cNvPicPr>
-            <a:picLocks noChangeAspect="1"/>
-          </p:cNvPicPr>
-          <p:nvPr/>
-        </p:nvPicPr>
-        <p:blipFill>
-          <a:blip r:embed="rId1"/>
-          <a:srcRect l="0" r="0" t="0" b="0"/>
-          <a:stretch/>
-        </p:blipFill>
-        <p:spPr>
-          <a:xfrm>
-            <a:off x="6035040" y="1554480"/>
-            <a:ext cx="5852160" cy="3657600"/>
-          </a:xfrm>
-          <a:prstGeom prst="rect">
-            <a:avLst/>
-          </a:prstGeom>
-        </p:spPr>
-      </p:pic>
-      <p:sp>
-        <p:nvSpPr>
-          <p:cNvPr id="5" name="Text 2"/>
-          <p:cNvSpPr/>
-          <p:nvPr/>
-        </p:nvSpPr>
-        <p:spPr>
-          <a:xfrm>
-            <a:off x="640080" y="1737360"/>
-            <a:ext cx="5212080" cy="3840480"/>
+      <p:sp>
+        <p:nvSpPr>
+          <p:cNvPr id="4" name="Text 2"/>
+          <p:cNvSpPr/>
+          <p:nvPr/>
+        </p:nvSpPr>
+        <p:spPr>
+          <a:xfrm>
+            <a:off x="731520" y="1554480"/>
+            <a:ext cx="10607040" cy="4572000"/>
           </a:xfrm>
           <a:prstGeom prst="rect">
             <a:avLst/>
@@ -4740,64 +4886,94 @@
           <a:bodyPr wrap="square" rtlCol="0" anchor="t"/>
           <a:lstStyle/>
           <a:p>
-            <a:pPr algn="l" indent="0" marL="0">
-              <a:buNone/>
-            </a:pPr>
-            <a:r>
-              <a:rPr lang="en-US" sz="1600" b="1" dirty="0">
+            <a:pPr algn="l" marL="342900" indent="-342900">
+              <a:spcAft>
+                <a:spcPts val="900"/>
+              </a:spcAft>
+              <a:buSzPct val="100000"/>
+              <a:buChar char="•"/>
+            </a:pPr>
+            <a:r>
+              <a:rPr lang="en-US" sz="2000" dirty="0">
                 <a:solidFill>
                   <a:srgbClr val="1E293B"/>
                 </a:solidFill>
               </a:rPr>
-              <a:t>Stable across every variant:
-</a:t>
-            </a:r>
-            <a:endParaRPr lang="en-US" sz="1600" dirty="0"/>
-          </a:p>
-          <a:p>
-            <a:pPr algn="l" indent="0" marL="0">
-              <a:buNone/>
-            </a:pPr>
-            <a:r>
-              <a:rPr lang="en-US" sz="1600" dirty="0">
+              <a:t>Raw hepatocyte UMI counts summed per donor.</a:t>
+            </a:r>
+            <a:endParaRPr lang="en-US" sz="2000" dirty="0"/>
+          </a:p>
+          <a:p>
+            <a:pPr algn="l" marL="342900" indent="-342900">
+              <a:spcAft>
+                <a:spcPts val="900"/>
+              </a:spcAft>
+              <a:buSzPct val="100000"/>
+              <a:buChar char="•"/>
+            </a:pPr>
+            <a:r>
+              <a:rPr lang="en-US" sz="2000" dirty="0">
                 <a:solidFill>
                   <a:srgbClr val="1E293B"/>
                 </a:solidFill>
               </a:rPr>
-              <a:t>PC = GLUL-only / CYP3A4-only / both;  PP = 2-of-4 / 3-of-4;
-ALDOB in/out;  CPS1-based;  threshold 1 vs 2 UMI.
-</a:t>
-            </a:r>
-            <a:endParaRPr lang="en-US" sz="1600" dirty="0"/>
-          </a:p>
-          <a:p>
-            <a:pPr algn="l" indent="0" marL="0">
-              <a:buNone/>
-            </a:pPr>
-            <a:r>
-              <a:rPr lang="en-US" sz="1600" b="1" dirty="0">
-                <a:solidFill>
-                  <a:srgbClr val="0D9488"/>
-                </a:solidFill>
-              </a:rPr>
-              <a:t>No PC depletion · no dual increase · no turn-off — in all.
-</a:t>
-            </a:r>
-            <a:endParaRPr lang="en-US" sz="1600" dirty="0"/>
-          </a:p>
-          <a:p>
-            <a:pPr algn="l" indent="0" marL="0">
-              <a:buNone/>
-            </a:pPr>
-            <a:r>
-              <a:rPr lang="en-US" sz="1600" i="1" dirty="0">
-                <a:solidFill>
-                  <a:srgbClr val="64748B"/>
-                </a:solidFill>
-              </a:rPr>
-              <a:t>Bound: large shift (~20 pp) excluded; subtle drift ≤10 pp not excluded (F4 n=4).</a:t>
-            </a:r>
-            <a:endParaRPr lang="en-US" sz="1600" dirty="0"/>
+              <a:t>filterByExpr retained 21,022 genes; TMM normalization.</a:t>
+            </a:r>
+            <a:endParaRPr lang="en-US" sz="2000" dirty="0"/>
+          </a:p>
+          <a:p>
+            <a:pPr algn="l" marL="342900" indent="-342900">
+              <a:spcAft>
+                <a:spcPts val="900"/>
+              </a:spcAft>
+              <a:buSzPct val="100000"/>
+              <a:buChar char="•"/>
+            </a:pPr>
+            <a:r>
+              <a:rPr lang="en-US" sz="2000" dirty="0">
+                <a:solidFill>
+                  <a:srgbClr val="1E293B"/>
+                </a:solidFill>
+              </a:rPr>
+              <a:t>edgeR negative-binomial quasi-likelihood GLM, robust dispersion; common BCV 0.405.</a:t>
+            </a:r>
+            <a:endParaRPr lang="en-US" sz="2000" dirty="0"/>
+          </a:p>
+          <a:p>
+            <a:pPr algn="l" marL="342900" indent="-342900">
+              <a:spcAft>
+                <a:spcPts val="900"/>
+              </a:spcAft>
+              <a:buSzPct val="100000"/>
+              <a:buChar char="•"/>
+            </a:pPr>
+            <a:r>
+              <a:rPr lang="en-US" sz="2000" dirty="0">
+                <a:solidFill>
+                  <a:srgbClr val="1E293B"/>
+                </a:solidFill>
+              </a:rPr>
+              <a:t>Primary contrast F4 vs F1.</a:t>
+            </a:r>
+            <a:endParaRPr lang="en-US" sz="2000" dirty="0"/>
+          </a:p>
+          <a:p>
+            <a:pPr algn="l" marL="342900" indent="-342900">
+              <a:spcAft>
+                <a:spcPts val="900"/>
+              </a:spcAft>
+              <a:buSzPct val="100000"/>
+              <a:buChar char="•"/>
+            </a:pPr>
+            <a:r>
+              <a:rPr lang="en-US" sz="2000" dirty="0">
+                <a:solidFill>
+                  <a:srgbClr val="1E293B"/>
+                </a:solidFill>
+              </a:rPr>
+              <a:t>Primary signal persists in DIRECTION with a run covariate and within a single run; significance attenuates with the smaller n (not a batch artifact).</a:t>
+            </a:r>
+            <a:endParaRPr lang="en-US" sz="2000" dirty="0"/>
           </a:p>
         </p:txBody>
       </p:sp>
@@ -4863,7 +5039,7 @@
                   <a:srgbClr val="1E293B"/>
                 </a:solidFill>
               </a:rPr>
-              <a:t>Zonation can fail in several different ways</a:t>
+              <a:t>Loss of the zonation expression signal is not one mechanism</a:t>
             </a:r>
             <a:endParaRPr lang="en-US" sz="3000" dirty="0"/>
           </a:p>
@@ -4877,7 +5053,7 @@
         </p:nvSpPr>
         <p:spPr>
           <a:xfrm>
-            <a:off x="914400" y="1737360"/>
+            <a:off x="914400" y="1600200"/>
             <a:ext cx="4754880" cy="502920"/>
           </a:xfrm>
           <a:prstGeom prst="roundRect">
@@ -4899,7 +5075,7 @@
         </p:nvSpPr>
         <p:spPr>
           <a:xfrm>
-            <a:off x="5669280" y="1737360"/>
+            <a:off x="5669280" y="1600200"/>
             <a:ext cx="4754880" cy="502920"/>
           </a:xfrm>
           <a:prstGeom prst="roundRect">
@@ -4921,7 +5097,7 @@
         </p:nvSpPr>
         <p:spPr>
           <a:xfrm>
-            <a:off x="548640" y="2286000"/>
+            <a:off x="548640" y="2148840"/>
             <a:ext cx="2194560" cy="274320"/>
           </a:xfrm>
           <a:prstGeom prst="rect">
@@ -4957,7 +5133,7 @@
         </p:nvSpPr>
         <p:spPr>
           <a:xfrm>
-            <a:off x="8595360" y="2286000"/>
+            <a:off x="8595360" y="2148840"/>
             <a:ext cx="2194560" cy="274320"/>
           </a:xfrm>
           <a:prstGeom prst="rect">
@@ -4993,7 +5169,7 @@
         </p:nvSpPr>
         <p:spPr>
           <a:xfrm>
-            <a:off x="914400" y="1737360"/>
+            <a:off x="914400" y="1600200"/>
             <a:ext cx="4754880" cy="502920"/>
           </a:xfrm>
           <a:prstGeom prst="rect">
@@ -5029,7 +5205,7 @@
         </p:nvSpPr>
         <p:spPr>
           <a:xfrm>
-            <a:off x="5669280" y="1737360"/>
+            <a:off x="5669280" y="1600200"/>
             <a:ext cx="4754880" cy="502920"/>
           </a:xfrm>
           <a:prstGeom prst="rect">
@@ -5065,8 +5241,8 @@
         </p:nvSpPr>
         <p:spPr>
           <a:xfrm>
-            <a:off x="914400" y="2606040"/>
-            <a:ext cx="4754880" cy="365760"/>
+            <a:off x="914400" y="2395728"/>
+            <a:ext cx="9509760" cy="320040"/>
           </a:xfrm>
           <a:prstGeom prst="rect">
             <a:avLst/>
@@ -5078,7 +5254,7 @@
           <a:bodyPr wrap="square" rtlCol="0" anchor="ctr"/>
           <a:lstStyle/>
           <a:p>
-            <a:pPr algn="ctr" indent="0" marL="0">
+            <a:pPr algn="l" indent="0" marL="0">
               <a:buNone/>
             </a:pPr>
             <a:r>
@@ -5087,9 +5263,9 @@
                   <a:srgbClr val="1D4ED8"/>
                 </a:solidFill>
               </a:rPr>
-              <a:t>PC markers: </a:t>
-            </a:r>
-            <a:pPr algn="ctr" indent="0" marL="0">
+              <a:t>Example PC markers: </a:t>
+            </a:r>
+            <a:pPr algn="l" indent="0" marL="0">
               <a:buNone/>
             </a:pPr>
             <a:r>
@@ -5100,6 +5276,17 @@
               </a:rPr>
               <a:t>GLUL, CYP3A4, CYP2E1 / detox</a:t>
             </a:r>
+            <a:pPr algn="l" indent="0" marL="0">
+              <a:buNone/>
+            </a:pPr>
+            <a:r>
+              <a:rPr lang="en-US" sz="1200" i="1" dirty="0">
+                <a:solidFill>
+                  <a:srgbClr val="64748B"/>
+                </a:solidFill>
+              </a:rPr>
+              <a:t>     (anchor markers used: GLUL, CYP3A4)</a:t>
+            </a:r>
             <a:endParaRPr lang="en-US" sz="1400" dirty="0"/>
           </a:p>
         </p:txBody>
@@ -5112,8 +5299,8 @@
         </p:nvSpPr>
         <p:spPr>
           <a:xfrm>
-            <a:off x="5669280" y="2606040"/>
-            <a:ext cx="4754880" cy="365760"/>
+            <a:off x="914400" y="2715768"/>
+            <a:ext cx="9509760" cy="320040"/>
           </a:xfrm>
           <a:prstGeom prst="rect">
             <a:avLst/>
@@ -5125,7 +5312,7 @@
           <a:bodyPr wrap="square" rtlCol="0" anchor="ctr"/>
           <a:lstStyle/>
           <a:p>
-            <a:pPr algn="ctr" indent="0" marL="0">
+            <a:pPr algn="l" indent="0" marL="0">
               <a:buNone/>
             </a:pPr>
             <a:r>
@@ -5134,9 +5321,9 @@
                   <a:srgbClr val="EA580C"/>
                 </a:solidFill>
               </a:rPr>
-              <a:t>PP markers: </a:t>
-            </a:r>
-            <a:pPr algn="ctr" indent="0" marL="0">
+              <a:t>Example PP markers: </a:t>
+            </a:r>
+            <a:pPr algn="l" indent="0" marL="0">
               <a:buNone/>
             </a:pPr>
             <a:r>
@@ -5145,7 +5332,7 @@
                   <a:srgbClr val="1E293B"/>
                 </a:solidFill>
               </a:rPr>
-              <a:t>ASS1, CPS1, PCK1, HAL, ALDOB / urea cycle</a:t>
+              <a:t>ASS1, CPS1, PCK1, HAL, ALDOB / urea cycle, gluconeogenesis</a:t>
             </a:r>
             <a:endParaRPr lang="en-US" sz="1400" dirty="0"/>
           </a:p>
@@ -5159,8 +5346,8 @@
         </p:nvSpPr>
         <p:spPr>
           <a:xfrm>
-            <a:off x="914400" y="3383280"/>
-            <a:ext cx="9509760" cy="365760"/>
+            <a:off x="914400" y="3291840"/>
+            <a:ext cx="9692640" cy="365760"/>
           </a:xfrm>
           <a:prstGeom prst="rect">
             <a:avLst/>
@@ -5181,7 +5368,7 @@
                   <a:srgbClr val="1E293B"/>
                 </a:solidFill>
               </a:rPr>
-              <a:t>De-zonation is not one mechanism — count signatures distinguish them:</a:t>
+              <a:t>De-zonation (within hepatocytes) can take several forms — count signatures distinguish them:</a:t>
             </a:r>
             <a:endParaRPr lang="en-US" sz="1700" dirty="0"/>
           </a:p>
@@ -5195,7 +5382,7 @@
         </p:nvSpPr>
         <p:spPr>
           <a:xfrm>
-            <a:off x="914400" y="3886200"/>
+            <a:off x="914400" y="3794760"/>
             <a:ext cx="2286000" cy="1005840"/>
           </a:xfrm>
           <a:prstGeom prst="roundRect">
@@ -5224,7 +5411,7 @@
         </p:nvSpPr>
         <p:spPr>
           <a:xfrm>
-            <a:off x="914400" y="3886200"/>
+            <a:off x="914400" y="3794760"/>
             <a:ext cx="2286000" cy="1005840"/>
           </a:xfrm>
           <a:prstGeom prst="rect">
@@ -5274,7 +5461,7 @@
         </p:nvSpPr>
         <p:spPr>
           <a:xfrm>
-            <a:off x="3429000" y="3886200"/>
+            <a:off x="3429000" y="3794760"/>
             <a:ext cx="2286000" cy="1005840"/>
           </a:xfrm>
           <a:prstGeom prst="roundRect">
@@ -5303,7 +5490,7 @@
         </p:nvSpPr>
         <p:spPr>
           <a:xfrm>
-            <a:off x="3429000" y="3886200"/>
+            <a:off x="3429000" y="3794760"/>
             <a:ext cx="2286000" cy="1005840"/>
           </a:xfrm>
           <a:prstGeom prst="rect">
@@ -5353,7 +5540,7 @@
         </p:nvSpPr>
         <p:spPr>
           <a:xfrm>
-            <a:off x="5943600" y="3886200"/>
+            <a:off x="5943600" y="3794760"/>
             <a:ext cx="2286000" cy="1005840"/>
           </a:xfrm>
           <a:prstGeom prst="roundRect">
@@ -5382,7 +5569,7 @@
         </p:nvSpPr>
         <p:spPr>
           <a:xfrm>
-            <a:off x="5943600" y="3886200"/>
+            <a:off x="5943600" y="3794760"/>
             <a:ext cx="2286000" cy="1005840"/>
           </a:xfrm>
           <a:prstGeom prst="rect">
@@ -5432,7 +5619,7 @@
         </p:nvSpPr>
         <p:spPr>
           <a:xfrm>
-            <a:off x="8458200" y="3886200"/>
+            <a:off x="8458200" y="3794760"/>
             <a:ext cx="1965960" cy="1005840"/>
           </a:xfrm>
           <a:prstGeom prst="roundRect">
@@ -5461,7 +5648,7 @@
         </p:nvSpPr>
         <p:spPr>
           <a:xfrm>
-            <a:off x="8458200" y="3886200"/>
+            <a:off x="8458200" y="3794760"/>
             <a:ext cx="1965960" cy="1005840"/>
           </a:xfrm>
           <a:prstGeom prst="rect">
@@ -5511,8 +5698,8 @@
         </p:nvSpPr>
         <p:spPr>
           <a:xfrm>
-            <a:off x="914400" y="5212080"/>
-            <a:ext cx="9509760" cy="457200"/>
+            <a:off x="914400" y="5074920"/>
+            <a:ext cx="9692640" cy="640080"/>
           </a:xfrm>
           <a:prstGeom prst="rect">
             <a:avLst/>
@@ -5528,14 +5715,14 @@
               <a:buNone/>
             </a:pPr>
             <a:r>
-              <a:rPr lang="en-US" sz="1500" i="1" dirty="0">
+              <a:rPr lang="en-US" sz="1450" i="1" dirty="0">
                 <a:solidFill>
                   <a:srgbClr val="64748B"/>
                 </a:solidFill>
               </a:rPr>
-              <a:t>A single anti-correlation or UMAP impression conflates these. We test each with absolute counts.</a:t>
-            </a:r>
-            <a:endParaRPr lang="en-US" sz="1500" dirty="0"/>
+              <a:t>A single anti-correlation or UMAP impression conflates these. We test each with absolute counts. (Transdifferentiation — a different, cross-cell-type axis — is on slide 8.)</a:t>
+            </a:r>
+            <a:endParaRPr lang="en-US" sz="1450" dirty="0"/>
           </a:p>
         </p:txBody>
       </p:sp>
@@ -5569,20 +5756,405 @@
                   <a:srgbClr val="64748B"/>
                 </a:solidFill>
               </a:rPr>
-              <a:t>Minimal context</a:t>
-            </a:r>
+              <a:t>Minimal context     ·     2 / 9</a:t>
+            </a:r>
+            <a:endParaRPr lang="en-US" sz="1100" dirty="0"/>
+          </a:p>
+        </p:txBody>
+      </p:sp>
+    </p:spTree>
+  </p:cSld>
+  <p:clrMapOvr>
+    <a:masterClrMapping/>
+  </p:clrMapOvr>
+</p:sld>
+</file>
+
+<file path=ppt/slides/slide20.xml><?xml version="1.0" encoding="utf-8"?>
+<p:sld xmlns:a="http://schemas.openxmlformats.org/drawingml/2006/main" xmlns:r="http://schemas.openxmlformats.org/officeDocument/2006/relationships" xmlns:p="http://schemas.openxmlformats.org/presentationml/2006/main">
+  <p:cSld name="Slide 20">
+    <p:bg>
+      <p:bgPr>
+        <a:solidFill>
+          <a:srgbClr val="FFFFFF"/>
+        </a:solidFill>
+      </p:bgPr>
+    </p:bg>
+    <p:spTree>
+      <p:nvGrpSpPr>
+        <p:cNvPr id="1" name=""/>
+        <p:cNvGrpSpPr/>
+        <p:nvPr/>
+      </p:nvGrpSpPr>
+      <p:grpSpPr>
+        <a:xfrm>
+          <a:off x="0" y="0"/>
+          <a:ext cx="0" cy="0"/>
+          <a:chOff x="0" y="0"/>
+          <a:chExt cx="0" cy="0"/>
+        </a:xfrm>
+      </p:grpSpPr>
+      <p:sp>
+        <p:nvSpPr>
+          <p:cNvPr id="2" name="Text 0"/>
+          <p:cNvSpPr/>
+          <p:nvPr/>
+        </p:nvSpPr>
+        <p:spPr>
+          <a:xfrm>
+            <a:off x="457200" y="256032"/>
+            <a:ext cx="2743200" cy="365760"/>
+          </a:xfrm>
+          <a:prstGeom prst="rect">
+            <a:avLst/>
+          </a:prstGeom>
+          <a:noFill/>
+          <a:ln/>
+        </p:spPr>
+        <p:txBody>
+          <a:bodyPr wrap="square" rtlCol="0" anchor="ctr"/>
+          <a:lstStyle/>
+          <a:p>
+            <a:pPr indent="0" marL="0">
+              <a:buNone/>
+            </a:pPr>
+            <a:r>
+              <a:rPr lang="en-US" sz="1300" b="1" dirty="0">
+                <a:solidFill>
+                  <a:srgbClr val="0D9488"/>
+                </a:solidFill>
+              </a:rPr>
+              <a:t>Backup</a:t>
+            </a:r>
+            <a:endParaRPr lang="en-US" sz="1300" dirty="0"/>
+          </a:p>
+        </p:txBody>
+      </p:sp>
+      <p:sp>
+        <p:nvSpPr>
+          <p:cNvPr id="3" name="Text 1"/>
+          <p:cNvSpPr/>
+          <p:nvPr/>
+        </p:nvSpPr>
+        <p:spPr>
+          <a:xfrm>
+            <a:off x="457200" y="603504"/>
+            <a:ext cx="11247120" cy="731520"/>
+          </a:xfrm>
+          <a:prstGeom prst="rect">
+            <a:avLst/>
+          </a:prstGeom>
+          <a:noFill/>
+          <a:ln/>
+        </p:spPr>
+        <p:txBody>
+          <a:bodyPr wrap="square" rtlCol="0" anchor="ctr"/>
+          <a:lstStyle/>
+          <a:p>
             <a:pPr algn="l" indent="0" marL="0">
               <a:buNone/>
             </a:pPr>
             <a:r>
-              <a:rPr lang="en-US" sz="1100" dirty="0">
-                <a:solidFill>
-                  <a:srgbClr val="64748B"/>
-                </a:solidFill>
-              </a:rPr>
-              <a:t>     ·     2 / 8</a:t>
-            </a:r>
-            <a:endParaRPr lang="en-US" sz="1100" dirty="0"/>
+              <a:rPr lang="en-US" sz="2600" b="1" dirty="0">
+                <a:solidFill>
+                  <a:srgbClr val="1E293B"/>
+                </a:solidFill>
+              </a:rPr>
+              <a:t>Does decontX prove contamination? No</a:t>
+            </a:r>
+            <a:endParaRPr lang="en-US" sz="2600" dirty="0"/>
+          </a:p>
+        </p:txBody>
+      </p:sp>
+      <p:sp>
+        <p:nvSpPr>
+          <p:cNvPr id="4" name="Text 2"/>
+          <p:cNvSpPr/>
+          <p:nvPr/>
+        </p:nvSpPr>
+        <p:spPr>
+          <a:xfrm>
+            <a:off x="731520" y="1554480"/>
+            <a:ext cx="10607040" cy="4572000"/>
+          </a:xfrm>
+          <a:prstGeom prst="rect">
+            <a:avLst/>
+          </a:prstGeom>
+          <a:noFill/>
+          <a:ln/>
+        </p:spPr>
+        <p:txBody>
+          <a:bodyPr wrap="square" rtlCol="0" anchor="t"/>
+          <a:lstStyle/>
+          <a:p>
+            <a:pPr algn="l" marL="342900" indent="-342900">
+              <a:spcAft>
+                <a:spcPts val="900"/>
+              </a:spcAft>
+              <a:buSzPct val="100000"/>
+              <a:buChar char="•"/>
+            </a:pPr>
+            <a:r>
+              <a:rPr lang="en-US" sz="2000" dirty="0">
+                <a:solidFill>
+                  <a:srgbClr val="1E293B"/>
+                </a:solidFill>
+              </a:rPr>
+              <a:t>decontX models a native + ambient RNA mixture and subtracts the estimate.</a:t>
+            </a:r>
+            <a:endParaRPr lang="en-US" sz="2000" dirty="0"/>
+          </a:p>
+          <a:p>
+            <a:pPr algn="l" marL="342900" indent="-342900">
+              <a:spcAft>
+                <a:spcPts val="900"/>
+              </a:spcAft>
+              <a:buSzPct val="100000"/>
+              <a:buChar char="•"/>
+            </a:pPr>
+            <a:r>
+              <a:rPr lang="en-US" sz="2000" dirty="0">
+                <a:solidFill>
+                  <a:srgbClr val="1E293B"/>
+                </a:solidFill>
+              </a:rPr>
+              <a:t>Hits 64 → 34; SOX4/SOX9 drop below significance → supports an ambient contribution.</a:t>
+            </a:r>
+            <a:endParaRPr lang="en-US" sz="2000" dirty="0"/>
+          </a:p>
+          <a:p>
+            <a:pPr algn="l" marL="342900" indent="-342900">
+              <a:spcAft>
+                <a:spcPts val="900"/>
+              </a:spcAft>
+              <a:buSzPct val="100000"/>
+              <a:buChar char="•"/>
+            </a:pPr>
+            <a:r>
+              <a:rPr lang="en-US" sz="2000" dirty="0">
+                <a:solidFill>
+                  <a:srgbClr val="1E293B"/>
+                </a:solidFill>
+              </a:rPr>
+              <a:t>But it can remove true hybrid signal OR leave residual contamination.</a:t>
+            </a:r>
+            <a:endParaRPr lang="en-US" sz="2000" dirty="0"/>
+          </a:p>
+          <a:p>
+            <a:pPr algn="l" marL="342900" indent="-342900">
+              <a:spcAft>
+                <a:spcPts val="900"/>
+              </a:spcAft>
+              <a:buSzPct val="100000"/>
+              <a:buChar char="•"/>
+            </a:pPr>
+            <a:r>
+              <a:rPr lang="en-US" sz="2000" dirty="0">
+                <a:solidFill>
+                  <a:srgbClr val="1E293B"/>
+                </a:solidFill>
+              </a:rPr>
+              <a:t>Therefore source attribution is a lead, not a closed verdict.</a:t>
+            </a:r>
+            <a:endParaRPr lang="en-US" sz="2000" dirty="0"/>
+          </a:p>
+        </p:txBody>
+      </p:sp>
+    </p:spTree>
+  </p:cSld>
+  <p:clrMapOvr>
+    <a:masterClrMapping/>
+  </p:clrMapOvr>
+</p:sld>
+</file>
+
+<file path=ppt/slides/slide21.xml><?xml version="1.0" encoding="utf-8"?>
+<p:sld xmlns:a="http://schemas.openxmlformats.org/drawingml/2006/main" xmlns:r="http://schemas.openxmlformats.org/officeDocument/2006/relationships" xmlns:p="http://schemas.openxmlformats.org/presentationml/2006/main">
+  <p:cSld name="Slide 21">
+    <p:bg>
+      <p:bgPr>
+        <a:solidFill>
+          <a:srgbClr val="FFFFFF"/>
+        </a:solidFill>
+      </p:bgPr>
+    </p:bg>
+    <p:spTree>
+      <p:nvGrpSpPr>
+        <p:cNvPr id="1" name=""/>
+        <p:cNvGrpSpPr/>
+        <p:nvPr/>
+      </p:nvGrpSpPr>
+      <p:grpSpPr>
+        <a:xfrm>
+          <a:off x="0" y="0"/>
+          <a:ext cx="0" cy="0"/>
+          <a:chOff x="0" y="0"/>
+          <a:chExt cx="0" cy="0"/>
+        </a:xfrm>
+      </p:grpSpPr>
+      <p:sp>
+        <p:nvSpPr>
+          <p:cNvPr id="2" name="Text 0"/>
+          <p:cNvSpPr/>
+          <p:nvPr/>
+        </p:nvSpPr>
+        <p:spPr>
+          <a:xfrm>
+            <a:off x="457200" y="256032"/>
+            <a:ext cx="2743200" cy="365760"/>
+          </a:xfrm>
+          <a:prstGeom prst="rect">
+            <a:avLst/>
+          </a:prstGeom>
+          <a:noFill/>
+          <a:ln/>
+        </p:spPr>
+        <p:txBody>
+          <a:bodyPr wrap="square" rtlCol="0" anchor="ctr"/>
+          <a:lstStyle/>
+          <a:p>
+            <a:pPr indent="0" marL="0">
+              <a:buNone/>
+            </a:pPr>
+            <a:r>
+              <a:rPr lang="en-US" sz="1300" b="1" dirty="0">
+                <a:solidFill>
+                  <a:srgbClr val="0D9488"/>
+                </a:solidFill>
+              </a:rPr>
+              <a:t>Backup</a:t>
+            </a:r>
+            <a:endParaRPr lang="en-US" sz="1300" dirty="0"/>
+          </a:p>
+        </p:txBody>
+      </p:sp>
+      <p:sp>
+        <p:nvSpPr>
+          <p:cNvPr id="3" name="Text 1"/>
+          <p:cNvSpPr/>
+          <p:nvPr/>
+        </p:nvSpPr>
+        <p:spPr>
+          <a:xfrm>
+            <a:off x="457200" y="603504"/>
+            <a:ext cx="11247120" cy="731520"/>
+          </a:xfrm>
+          <a:prstGeom prst="rect">
+            <a:avLst/>
+          </a:prstGeom>
+          <a:noFill/>
+          <a:ln/>
+        </p:spPr>
+        <p:txBody>
+          <a:bodyPr wrap="square" rtlCol="0" anchor="ctr"/>
+          <a:lstStyle/>
+          <a:p>
+            <a:pPr algn="l" indent="0" marL="0">
+              <a:buNone/>
+            </a:pPr>
+            <a:r>
+              <a:rPr lang="en-US" sz="2600" b="1" dirty="0">
+                <a:solidFill>
+                  <a:srgbClr val="1E293B"/>
+                </a:solidFill>
+              </a:rPr>
+              <a:t>The one analysis still owed: gene-set testing</a:t>
+            </a:r>
+            <a:endParaRPr lang="en-US" sz="2600" dirty="0"/>
+          </a:p>
+        </p:txBody>
+      </p:sp>
+      <p:sp>
+        <p:nvSpPr>
+          <p:cNvPr id="4" name="Text 2"/>
+          <p:cNvSpPr/>
+          <p:nvPr/>
+        </p:nvSpPr>
+        <p:spPr>
+          <a:xfrm>
+            <a:off x="731520" y="1554480"/>
+            <a:ext cx="10607040" cy="4572000"/>
+          </a:xfrm>
+          <a:prstGeom prst="rect">
+            <a:avLst/>
+          </a:prstGeom>
+          <a:noFill/>
+          <a:ln/>
+        </p:spPr>
+        <p:txBody>
+          <a:bodyPr wrap="square" rtlCol="0" anchor="t"/>
+          <a:lstStyle/>
+          <a:p>
+            <a:pPr algn="l" marL="342900" indent="-342900">
+              <a:spcAft>
+                <a:spcPts val="900"/>
+              </a:spcAft>
+              <a:buSzPct val="100000"/>
+              <a:buChar char="•"/>
+            </a:pPr>
+            <a:r>
+              <a:rPr lang="en-US" sz="2000" dirty="0">
+                <a:solidFill>
+                  <a:srgbClr val="1E293B"/>
+                </a:solidFill>
+              </a:rPr>
+              <a:t>Gene-level FDR can miss a coordinated WEAK program (many genes, small shifts).</a:t>
+            </a:r>
+            <a:endParaRPr lang="en-US" sz="2000" dirty="0"/>
+          </a:p>
+          <a:p>
+            <a:pPr algn="l" marL="342900" indent="-342900">
+              <a:spcAft>
+                <a:spcPts val="900"/>
+              </a:spcAft>
+              <a:buSzPct val="100000"/>
+              <a:buChar char="•"/>
+            </a:pPr>
+            <a:r>
+              <a:rPr lang="en-US" sz="2000" dirty="0">
+                <a:solidFill>
+                  <a:srgbClr val="1E293B"/>
+                </a:solidFill>
+              </a:rPr>
+              <a:t>CAMERA + ROAST on pre-specified sets: PC, PP, detox, urea cycle, bile-acid/lipid,</a:t>
+            </a:r>
+            <a:endParaRPr lang="en-US" sz="2000" dirty="0"/>
+          </a:p>
+          <a:p>
+            <a:pPr algn="l" marL="342900" indent="-342900">
+              <a:spcAft>
+                <a:spcPts val="900"/>
+              </a:spcAft>
+              <a:buSzPct val="100000"/>
+              <a:buChar char="•"/>
+            </a:pPr>
+            <a:r>
+              <a:rPr lang="en-US" sz="2000" dirty="0">
+                <a:solidFill>
+                  <a:srgbClr val="1E293B"/>
+                </a:solidFill>
+              </a:rPr>
+              <a:t>mitochondrial, ER stress, interferon, hypoxia, EMT/fetal/progenitor, cholangiocyte/ductular.</a:t>
+            </a:r>
+            <a:endParaRPr lang="en-US" sz="2000" dirty="0"/>
+          </a:p>
+          <a:p>
+            <a:pPr algn="l" marL="342900" indent="-342900">
+              <a:spcAft>
+                <a:spcPts val="900"/>
+              </a:spcAft>
+              <a:buSzPct val="100000"/>
+              <a:buChar char="•"/>
+            </a:pPr>
+            <a:r>
+              <a:rPr lang="en-US" sz="2000" dirty="0">
+                <a:solidFill>
+                  <a:srgbClr val="1E293B"/>
+                </a:solidFill>
+              </a:rPr>
+              <a:t>Closes the caveat behind “no other large hepatocyte program.”</a:t>
+            </a:r>
+            <a:endParaRPr lang="en-US" sz="2000" dirty="0"/>
           </a:p>
         </p:txBody>
       </p:sp>
@@ -6393,7 +6965,7 @@
         </p:nvSpPr>
         <p:spPr>
           <a:xfrm>
-            <a:off x="914400" y="3977640"/>
+            <a:off x="914400" y="3931920"/>
             <a:ext cx="10058400" cy="365760"/>
           </a:xfrm>
           <a:prstGeom prst="rect">
@@ -6429,8 +7001,44 @@
         </p:nvSpPr>
         <p:spPr>
           <a:xfrm>
-            <a:off x="1463040" y="4572000"/>
-            <a:ext cx="9144000" cy="1463040"/>
+            <a:off x="914400" y="4370832"/>
+            <a:ext cx="10058400" cy="320040"/>
+          </a:xfrm>
+          <a:prstGeom prst="rect">
+            <a:avLst/>
+          </a:prstGeom>
+          <a:noFill/>
+          <a:ln/>
+        </p:spPr>
+        <p:txBody>
+          <a:bodyPr wrap="square" rtlCol="0" anchor="ctr"/>
+          <a:lstStyle/>
+          <a:p>
+            <a:pPr algn="ctr" indent="0" marL="0">
+              <a:buNone/>
+            </a:pPr>
+            <a:r>
+              <a:rPr lang="en-US" sz="1400" i="1" dirty="0">
+                <a:solidFill>
+                  <a:srgbClr val="0D9488"/>
+                </a:solidFill>
+              </a:rPr>
+              <a:t>Primary inference: biopsy F1–F4.  F0 (n=2) shown for context.</a:t>
+            </a:r>
+            <a:endParaRPr lang="en-US" sz="1400" dirty="0"/>
+          </a:p>
+        </p:txBody>
+      </p:sp>
+      <p:sp>
+        <p:nvSpPr>
+          <p:cNvPr id="27" name="Text 25"/>
+          <p:cNvSpPr/>
+          <p:nvPr/>
+        </p:nvSpPr>
+        <p:spPr>
+          <a:xfrm>
+            <a:off x="1554480" y="4846320"/>
+            <a:ext cx="9144000" cy="1280160"/>
           </a:xfrm>
           <a:prstGeom prst="rect">
             <a:avLst/>
@@ -6444,62 +7052,62 @@
           <a:p>
             <a:pPr algn="l" marL="342900" indent="-342900">
               <a:spcAft>
-                <a:spcPts val="600"/>
+                <a:spcPts val="500"/>
               </a:spcAft>
               <a:buSzPct val="100000"/>
               <a:buChar char="•"/>
             </a:pPr>
             <a:r>
-              <a:rPr lang="en-US" sz="1900" dirty="0">
+              <a:rPr lang="en-US" sz="1800" dirty="0">
                 <a:solidFill>
                   <a:srgbClr val="1E293B"/>
                 </a:solidFill>
               </a:rPr>
               <a:t>The full trajectory is also an acquisition trajectory.</a:t>
             </a:r>
-            <a:endParaRPr lang="en-US" sz="1900" dirty="0"/>
+            <a:endParaRPr lang="en-US" sz="1800" dirty="0"/>
           </a:p>
           <a:p>
             <a:pPr algn="l" marL="342900" indent="-342900">
               <a:spcAft>
-                <a:spcPts val="600"/>
+                <a:spcPts val="500"/>
               </a:spcAft>
               <a:buSzPct val="100000"/>
               <a:buChar char="•"/>
             </a:pPr>
             <a:r>
-              <a:rPr lang="en-US" sz="1900" dirty="0">
+              <a:rPr lang="en-US" sz="1800" dirty="0">
                 <a:solidFill>
                   <a:srgbClr val="1E293B"/>
                 </a:solidFill>
               </a:rPr>
-              <a:t>So healthy / end-stage comparisons cannot cleanly isolate disease biology.</a:t>
-            </a:r>
-            <a:endParaRPr lang="en-US" sz="1900" dirty="0"/>
+              <a:t>Healthy / end-stage comparisons cannot cleanly isolate disease biology.</a:t>
+            </a:r>
+            <a:endParaRPr lang="en-US" sz="1800" dirty="0"/>
           </a:p>
           <a:p>
             <a:pPr algn="l" marL="342900" indent="-342900">
               <a:spcAft>
-                <a:spcPts val="600"/>
+                <a:spcPts val="500"/>
               </a:spcAft>
               <a:buSzPct val="100000"/>
               <a:buChar char="•"/>
             </a:pPr>
             <a:r>
-              <a:rPr lang="en-US" sz="1900" b="1" dirty="0">
+              <a:rPr lang="en-US" sz="1800" b="1" dirty="0">
                 <a:solidFill>
                   <a:srgbClr val="0D9488"/>
                 </a:solidFill>
               </a:rPr>
               <a:t>Clean axis used here: biopsy-only F1–F4.</a:t>
             </a:r>
-            <a:endParaRPr lang="en-US" sz="1900" dirty="0"/>
-          </a:p>
-        </p:txBody>
-      </p:sp>
-      <p:sp>
-        <p:nvSpPr>
-          <p:cNvPr id="27" name="Text 25"/>
+            <a:endParaRPr lang="en-US" sz="1800" dirty="0"/>
+          </a:p>
+        </p:txBody>
+      </p:sp>
+      <p:sp>
+        <p:nvSpPr>
+          <p:cNvPr id="28" name="Text 26"/>
           <p:cNvSpPr/>
           <p:nvPr/>
         </p:nvSpPr>
@@ -6527,18 +7135,7 @@
                   <a:srgbClr val="64748B"/>
                 </a:solidFill>
               </a:rPr>
-              <a:t>The load-bearing confound</a:t>
-            </a:r>
-            <a:pPr algn="l" indent="0" marL="0">
-              <a:buNone/>
-            </a:pPr>
-            <a:r>
-              <a:rPr lang="en-US" sz="1100" dirty="0">
-                <a:solidFill>
-                  <a:srgbClr val="64748B"/>
-                </a:solidFill>
-              </a:rPr>
-              <a:t>     ·     3 / 8</a:t>
+              <a:t>The load-bearing confound     ·     3 / 9</a:t>
             </a:r>
             <a:endParaRPr lang="en-US" sz="1100" dirty="0"/>
           </a:p>
@@ -6627,8 +7224,8 @@
         </p:blipFill>
         <p:spPr>
           <a:xfrm>
-            <a:off x="365760" y="1371600"/>
-            <a:ext cx="7863840" cy="4754880"/>
+            <a:off x="274320" y="1417320"/>
+            <a:ext cx="8229600" cy="4114800"/>
           </a:xfrm>
           <a:prstGeom prst="rect">
             <a:avLst/>
@@ -6637,14 +7234,79 @@
       </p:pic>
       <p:sp>
         <p:nvSpPr>
-          <p:cNvPr id="4" name="Text 1"/>
-          <p:cNvSpPr/>
-          <p:nvPr/>
-        </p:nvSpPr>
-        <p:spPr>
-          <a:xfrm>
-            <a:off x="8412480" y="2103120"/>
-            <a:ext cx="3474720" cy="2743200"/>
+          <p:cNvPr id="4" name="Shape 1"/>
+          <p:cNvSpPr/>
+          <p:nvPr/>
+        </p:nvSpPr>
+        <p:spPr>
+          <a:xfrm>
+            <a:off x="8595360" y="1554480"/>
+            <a:ext cx="3291840" cy="1371600"/>
+          </a:xfrm>
+          <a:prstGeom prst="roundRect">
+            <a:avLst>
+              <a:gd name="adj" fmla="val 5333"/>
+            </a:avLst>
+          </a:prstGeom>
+          <a:solidFill>
+            <a:srgbClr val="FEF2F2"/>
+          </a:solidFill>
+          <a:ln/>
+          <a:effectLst>
+            <a:outerShdw sx="100000" sy="100000" kx="0" ky="0" algn="bl" rotWithShape="0" blurRad="88900" dist="38100" dir="5400000">
+              <a:srgbClr val="000000">
+                <a:alpha val="12000"/>
+              </a:srgbClr>
+            </a:outerShdw>
+          </a:effectLst>
+        </p:spPr>
+      </p:sp>
+      <p:sp>
+        <p:nvSpPr>
+          <p:cNvPr id="5" name="Text 2"/>
+          <p:cNvSpPr/>
+          <p:nvPr/>
+        </p:nvSpPr>
+        <p:spPr>
+          <a:xfrm>
+            <a:off x="8686800" y="1627632"/>
+            <a:ext cx="3108960" cy="1234440"/>
+          </a:xfrm>
+          <a:prstGeom prst="rect">
+            <a:avLst/>
+          </a:prstGeom>
+          <a:noFill/>
+          <a:ln/>
+        </p:spPr>
+        <p:txBody>
+          <a:bodyPr wrap="square" rtlCol="0" anchor="ctr"/>
+          <a:lstStyle/>
+          <a:p>
+            <a:pPr algn="l" indent="0" marL="0">
+              <a:buNone/>
+            </a:pPr>
+            <a:r>
+              <a:rPr lang="en-US" sz="1600" b="1" dirty="0">
+                <a:solidFill>
+                  <a:srgbClr val="DC2626"/>
+                </a:solidFill>
+              </a:rPr>
+              <a:t>Same immediate-early stress spike in hepatocytes AND endothelial cells</a:t>
+            </a:r>
+            <a:endParaRPr lang="en-US" sz="1600" dirty="0"/>
+          </a:p>
+        </p:txBody>
+      </p:sp>
+      <p:sp>
+        <p:nvSpPr>
+          <p:cNvPr id="6" name="Text 3"/>
+          <p:cNvSpPr/>
+          <p:nvPr/>
+        </p:nvSpPr>
+        <p:spPr>
+          <a:xfrm>
+            <a:off x="8641080" y="3154680"/>
+            <a:ext cx="3383280" cy="2560320"/>
           </a:xfrm>
           <a:prstGeom prst="rect">
             <a:avLst/>
@@ -6658,62 +7320,62 @@
           <a:p>
             <a:pPr algn="l" marL="342900" indent="-342900">
               <a:spcAft>
-                <a:spcPts val="1000"/>
+                <a:spcPts val="900"/>
               </a:spcAft>
               <a:buSzPct val="100000"/>
               <a:buChar char="•"/>
             </a:pPr>
             <a:r>
-              <a:rPr lang="en-US" sz="1800" dirty="0">
+              <a:rPr lang="en-US" sz="1600" dirty="0">
                 <a:solidFill>
                   <a:srgbClr val="1E293B"/>
                 </a:solidFill>
               </a:rPr>
-              <a:t>Stress genes: FOS, JUN(B/D), ATF3, DUSP1, HSPA1A/B.</a:t>
-            </a:r>
-            <a:endParaRPr lang="en-US" sz="1800" dirty="0"/>
+              <a:t>Stress genes: FOS, JUN, JUNB, JUND, ATF3, DUSP1, HSPA1A/B.</a:t>
+            </a:r>
+            <a:endParaRPr lang="en-US" sz="1600" dirty="0"/>
           </a:p>
           <a:p>
             <a:pPr algn="l" marL="342900" indent="-342900">
               <a:spcAft>
-                <a:spcPts val="1000"/>
+                <a:spcPts val="900"/>
               </a:spcAft>
               <a:buSzPct val="100000"/>
               <a:buChar char="•"/>
             </a:pPr>
             <a:r>
-              <a:rPr lang="en-US" sz="1800" b="1" dirty="0">
+              <a:rPr lang="en-US" sz="1600" b="1" dirty="0">
                 <a:solidFill>
                   <a:srgbClr val="1E293B"/>
                 </a:solidFill>
               </a:rPr>
-              <a:t>The same spike appears in non-zonated endothelial cells.</a:t>
-            </a:r>
-            <a:endParaRPr lang="en-US" sz="1800" dirty="0"/>
+              <a:t>Endothelial cells have no zonation program.</a:t>
+            </a:r>
+            <a:endParaRPr lang="en-US" sz="1600" dirty="0"/>
           </a:p>
           <a:p>
             <a:pPr algn="l" marL="342900" indent="-342900">
               <a:spcAft>
-                <a:spcPts val="1000"/>
+                <a:spcPts val="900"/>
               </a:spcAft>
               <a:buSzPct val="100000"/>
               <a:buChar char="•"/>
             </a:pPr>
             <a:r>
-              <a:rPr lang="en-US" sz="1800" b="1" dirty="0">
+              <a:rPr lang="en-US" sz="1600" b="1" dirty="0">
                 <a:solidFill>
                   <a:srgbClr val="DC2626"/>
                 </a:solidFill>
               </a:rPr>
-              <a:t>→ acquisition/procurement signal, not hepatocyte zonation biology.</a:t>
-            </a:r>
-            <a:endParaRPr lang="en-US" sz="1800" dirty="0"/>
-          </a:p>
-        </p:txBody>
-      </p:sp>
-      <p:sp>
-        <p:nvSpPr>
-          <p:cNvPr id="5" name="Text 2"/>
+              <a:t>→ acquisition / procurement signal, not hepatocyte zonation biology.</a:t>
+            </a:r>
+            <a:endParaRPr lang="en-US" sz="1600" dirty="0"/>
+          </a:p>
+        </p:txBody>
+      </p:sp>
+      <p:sp>
+        <p:nvSpPr>
+          <p:cNvPr id="7" name="Text 4"/>
           <p:cNvSpPr/>
           <p:nvPr/>
         </p:nvSpPr>
@@ -6741,18 +7403,7 @@
                   <a:srgbClr val="64748B"/>
                 </a:solidFill>
               </a:rPr>
-              <a:t>Stress validates the confound  ·  donor-level, down-thinned to 1,500 UMIs</a:t>
-            </a:r>
-            <a:pPr algn="l" indent="0" marL="0">
-              <a:buNone/>
-            </a:pPr>
-            <a:r>
-              <a:rPr lang="en-US" sz="1100" dirty="0">
-                <a:solidFill>
-                  <a:srgbClr val="64748B"/>
-                </a:solidFill>
-              </a:rPr>
-              <a:t>     ·     4 / 8</a:t>
+              <a:t>Stress validates the confound  ·  donor-level, down-thinned to 1,500 UMIs     ·     4 / 9</a:t>
             </a:r>
             <a:endParaRPr lang="en-US" sz="1100" dirty="0"/>
           </a:p>
@@ -6820,7 +7471,7 @@
                   <a:srgbClr val="1E293B"/>
                 </a:solidFill>
               </a:rPr>
-              <a:t>Raw-count anchor classification: biopsy zonation is preserved</a:t>
+              <a:t>We test zonation with raw counts at the donor level, not a relative ruler</a:t>
             </a:r>
             <a:endParaRPr lang="en-US" sz="3000" dirty="0"/>
           </a:p>
@@ -6834,18 +7485,18 @@
         </p:nvSpPr>
         <p:spPr>
           <a:xfrm>
-            <a:off x="457200" y="1325880"/>
-            <a:ext cx="2057400" cy="502920"/>
+            <a:off x="548640" y="1600200"/>
+            <a:ext cx="2148840" cy="777240"/>
           </a:xfrm>
           <a:prstGeom prst="roundRect">
             <a:avLst>
-              <a:gd name="adj" fmla="val 10909"/>
+              <a:gd name="adj" fmla="val 8235"/>
             </a:avLst>
           </a:prstGeom>
           <a:solidFill>
             <a:srgbClr val="F1F5F9"/>
           </a:solidFill>
-          <a:ln w="12700">
+          <a:ln w="15240">
             <a:solidFill>
               <a:srgbClr val="CBD5E1"/>
             </a:solidFill>
@@ -6861,31 +7512,31 @@
         </p:nvSpPr>
         <p:spPr>
           <a:xfrm>
-            <a:off x="457200" y="1325880"/>
-            <a:ext cx="2057400" cy="502920"/>
-          </a:xfrm>
-          <a:prstGeom prst="rect">
-            <a:avLst/>
-          </a:prstGeom>
-          <a:noFill/>
-          <a:ln/>
-        </p:spPr>
-        <p:txBody>
-          <a:bodyPr wrap="square" lIns="12700" tIns="12700" rIns="12700" bIns="12700" rtlCol="0" anchor="ctr"/>
+            <a:off x="548640" y="1600200"/>
+            <a:ext cx="2148840" cy="777240"/>
+          </a:xfrm>
+          <a:prstGeom prst="rect">
+            <a:avLst/>
+          </a:prstGeom>
+          <a:noFill/>
+          <a:ln/>
+        </p:spPr>
+        <p:txBody>
+          <a:bodyPr wrap="square" lIns="38100" tIns="38100" rIns="38100" bIns="38100" rtlCol="0" anchor="ctr"/>
           <a:lstStyle/>
           <a:p>
             <a:pPr algn="ctr" indent="0" marL="0">
               <a:buNone/>
             </a:pPr>
             <a:r>
-              <a:rPr lang="en-US" sz="1250" dirty="0">
+              <a:rPr lang="en-US" sz="1400" dirty="0">
                 <a:solidFill>
                   <a:srgbClr val="1E293B"/>
                 </a:solidFill>
               </a:rPr>
-              <a:t>raw UMIs</a:t>
-            </a:r>
-            <a:endParaRPr lang="en-US" sz="1250" dirty="0"/>
+              <a:t>raw UMI counts</a:t>
+            </a:r>
+            <a:endParaRPr lang="en-US" sz="1400" dirty="0"/>
           </a:p>
         </p:txBody>
       </p:sp>
@@ -6897,14 +7548,14 @@
         </p:nvSpPr>
         <p:spPr>
           <a:xfrm>
-            <a:off x="2514600" y="1572768"/>
-            <a:ext cx="182880" cy="0"/>
+            <a:off x="2697480" y="1984248"/>
+            <a:ext cx="201168" cy="0"/>
           </a:xfrm>
           <a:prstGeom prst="line">
             <a:avLst/>
           </a:prstGeom>
           <a:noFill/>
-          <a:ln w="19050">
+          <a:ln w="20320">
             <a:solidFill>
               <a:srgbClr val="64748B"/>
             </a:solidFill>
@@ -6921,18 +7572,18 @@
         </p:nvSpPr>
         <p:spPr>
           <a:xfrm>
-            <a:off x="2697480" y="1325880"/>
-            <a:ext cx="2057400" cy="502920"/>
+            <a:off x="2898648" y="1600200"/>
+            <a:ext cx="2148840" cy="777240"/>
           </a:xfrm>
           <a:prstGeom prst="roundRect">
             <a:avLst>
-              <a:gd name="adj" fmla="val 10909"/>
+              <a:gd name="adj" fmla="val 8235"/>
             </a:avLst>
           </a:prstGeom>
           <a:solidFill>
             <a:srgbClr val="F1F5F9"/>
           </a:solidFill>
-          <a:ln w="12700">
+          <a:ln w="15240">
             <a:solidFill>
               <a:srgbClr val="CBD5E1"/>
             </a:solidFill>
@@ -6948,31 +7599,31 @@
         </p:nvSpPr>
         <p:spPr>
           <a:xfrm>
-            <a:off x="2697480" y="1325880"/>
-            <a:ext cx="2057400" cy="502920"/>
-          </a:xfrm>
-          <a:prstGeom prst="rect">
-            <a:avLst/>
-          </a:prstGeom>
-          <a:noFill/>
-          <a:ln/>
-        </p:spPr>
-        <p:txBody>
-          <a:bodyPr wrap="square" lIns="12700" tIns="12700" rIns="12700" bIns="12700" rtlCol="0" anchor="ctr"/>
+            <a:off x="2898648" y="1600200"/>
+            <a:ext cx="2148840" cy="777240"/>
+          </a:xfrm>
+          <a:prstGeom prst="rect">
+            <a:avLst/>
+          </a:prstGeom>
+          <a:noFill/>
+          <a:ln/>
+        </p:spPr>
+        <p:txBody>
+          <a:bodyPr wrap="square" lIns="38100" tIns="38100" rIns="38100" bIns="38100" rtlCol="0" anchor="ctr"/>
           <a:lstStyle/>
           <a:p>
             <a:pPr algn="ctr" indent="0" marL="0">
               <a:buNone/>
             </a:pPr>
             <a:r>
-              <a:rPr lang="en-US" sz="1250" dirty="0">
+              <a:rPr lang="en-US" sz="1400" dirty="0">
                 <a:solidFill>
                   <a:srgbClr val="1E293B"/>
                 </a:solidFill>
               </a:rPr>
-              <a:t>down-thin to 1,500</a:t>
-            </a:r>
-            <a:endParaRPr lang="en-US" sz="1250" dirty="0"/>
+              <a:t>down-thin every nucleus to 1,500</a:t>
+            </a:r>
+            <a:endParaRPr lang="en-US" sz="1400" dirty="0"/>
           </a:p>
         </p:txBody>
       </p:sp>
@@ -6984,14 +7635,14 @@
         </p:nvSpPr>
         <p:spPr>
           <a:xfrm>
-            <a:off x="4754880" y="1572768"/>
-            <a:ext cx="182880" cy="0"/>
+            <a:off x="5047488" y="1984248"/>
+            <a:ext cx="201168" cy="0"/>
           </a:xfrm>
           <a:prstGeom prst="line">
             <a:avLst/>
           </a:prstGeom>
           <a:noFill/>
-          <a:ln w="19050">
+          <a:ln w="20320">
             <a:solidFill>
               <a:srgbClr val="64748B"/>
             </a:solidFill>
@@ -7008,18 +7659,18 @@
         </p:nvSpPr>
         <p:spPr>
           <a:xfrm>
-            <a:off x="4937760" y="1325880"/>
-            <a:ext cx="2057400" cy="502920"/>
+            <a:off x="5248656" y="1600200"/>
+            <a:ext cx="2148840" cy="777240"/>
           </a:xfrm>
           <a:prstGeom prst="roundRect">
             <a:avLst>
-              <a:gd name="adj" fmla="val 10909"/>
+              <a:gd name="adj" fmla="val 8235"/>
             </a:avLst>
           </a:prstGeom>
           <a:solidFill>
             <a:srgbClr val="EDE9FE"/>
           </a:solidFill>
-          <a:ln w="12700">
+          <a:ln w="15240">
             <a:solidFill>
               <a:srgbClr val="7C3AED"/>
             </a:solidFill>
@@ -7035,31 +7686,31 @@
         </p:nvSpPr>
         <p:spPr>
           <a:xfrm>
-            <a:off x="4937760" y="1325880"/>
-            <a:ext cx="2057400" cy="502920"/>
-          </a:xfrm>
-          <a:prstGeom prst="rect">
-            <a:avLst/>
-          </a:prstGeom>
-          <a:noFill/>
-          <a:ln/>
-        </p:spPr>
-        <p:txBody>
-          <a:bodyPr wrap="square" lIns="12700" tIns="12700" rIns="12700" bIns="12700" rtlCol="0" anchor="ctr"/>
+            <a:off x="5248656" y="1600200"/>
+            <a:ext cx="2148840" cy="777240"/>
+          </a:xfrm>
+          <a:prstGeom prst="rect">
+            <a:avLst/>
+          </a:prstGeom>
+          <a:noFill/>
+          <a:ln/>
+        </p:spPr>
+        <p:txBody>
+          <a:bodyPr wrap="square" lIns="38100" tIns="38100" rIns="38100" bIns="38100" rtlCol="0" anchor="ctr"/>
           <a:lstStyle/>
           <a:p>
             <a:pPr algn="ctr" indent="0" marL="0">
               <a:buNone/>
             </a:pPr>
             <a:r>
-              <a:rPr lang="en-US" sz="1250" b="1" dirty="0">
+              <a:rPr lang="en-US" sz="1400" b="1" dirty="0">
                 <a:solidFill>
                   <a:srgbClr val="7C3AED"/>
                 </a:solidFill>
               </a:rPr>
-              <a:t>marker ON if ≥2 UMI</a:t>
-            </a:r>
-            <a:endParaRPr lang="en-US" sz="1250" dirty="0"/>
+              <a:t>marker ON only if ≥ 2 UMI</a:t>
+            </a:r>
+            <a:endParaRPr lang="en-US" sz="1400" dirty="0"/>
           </a:p>
         </p:txBody>
       </p:sp>
@@ -7071,14 +7722,14 @@
         </p:nvSpPr>
         <p:spPr>
           <a:xfrm>
-            <a:off x="6995160" y="1572768"/>
-            <a:ext cx="182880" cy="0"/>
+            <a:off x="7397496" y="1984248"/>
+            <a:ext cx="201168" cy="0"/>
           </a:xfrm>
           <a:prstGeom prst="line">
             <a:avLst/>
           </a:prstGeom>
           <a:noFill/>
-          <a:ln w="19050">
+          <a:ln w="20320">
             <a:solidFill>
               <a:srgbClr val="64748B"/>
             </a:solidFill>
@@ -7095,18 +7746,18 @@
         </p:nvSpPr>
         <p:spPr>
           <a:xfrm>
-            <a:off x="7178040" y="1325880"/>
-            <a:ext cx="2057400" cy="502920"/>
+            <a:off x="7598664" y="1600200"/>
+            <a:ext cx="2148840" cy="777240"/>
           </a:xfrm>
           <a:prstGeom prst="roundRect">
             <a:avLst>
-              <a:gd name="adj" fmla="val 10909"/>
+              <a:gd name="adj" fmla="val 8235"/>
             </a:avLst>
           </a:prstGeom>
           <a:solidFill>
             <a:srgbClr val="F1F5F9"/>
           </a:solidFill>
-          <a:ln w="12700">
+          <a:ln w="15240">
             <a:solidFill>
               <a:srgbClr val="CBD5E1"/>
             </a:solidFill>
@@ -7122,31 +7773,31 @@
         </p:nvSpPr>
         <p:spPr>
           <a:xfrm>
-            <a:off x="7178040" y="1325880"/>
-            <a:ext cx="2057400" cy="502920"/>
-          </a:xfrm>
-          <a:prstGeom prst="rect">
-            <a:avLst/>
-          </a:prstGeom>
-          <a:noFill/>
-          <a:ln/>
-        </p:spPr>
-        <p:txBody>
-          <a:bodyPr wrap="square" lIns="12700" tIns="12700" rIns="12700" bIns="12700" rtlCol="0" anchor="ctr"/>
+            <a:off x="7598664" y="1600200"/>
+            <a:ext cx="2148840" cy="777240"/>
+          </a:xfrm>
+          <a:prstGeom prst="rect">
+            <a:avLst/>
+          </a:prstGeom>
+          <a:noFill/>
+          <a:ln/>
+        </p:spPr>
+        <p:txBody>
+          <a:bodyPr wrap="square" lIns="38100" tIns="38100" rIns="38100" bIns="38100" rtlCol="0" anchor="ctr"/>
           <a:lstStyle/>
           <a:p>
             <a:pPr algn="ctr" indent="0" marL="0">
               <a:buNone/>
             </a:pPr>
             <a:r>
-              <a:rPr lang="en-US" sz="1250" dirty="0">
+              <a:rPr lang="en-US" sz="1400" dirty="0">
                 <a:solidFill>
                   <a:srgbClr val="1E293B"/>
                 </a:solidFill>
               </a:rPr>
-              <a:t>classify nucleus</a:t>
-            </a:r>
-            <a:endParaRPr lang="en-US" sz="1250" dirty="0"/>
+              <a:t>classify each nucleus</a:t>
+            </a:r>
+            <a:endParaRPr lang="en-US" sz="1400" dirty="0"/>
           </a:p>
         </p:txBody>
       </p:sp>
@@ -7158,14 +7809,14 @@
         </p:nvSpPr>
         <p:spPr>
           <a:xfrm>
-            <a:off x="9235440" y="1572768"/>
-            <a:ext cx="182880" cy="0"/>
+            <a:off x="9747504" y="1984248"/>
+            <a:ext cx="201168" cy="0"/>
           </a:xfrm>
           <a:prstGeom prst="line">
             <a:avLst/>
           </a:prstGeom>
           <a:noFill/>
-          <a:ln w="19050">
+          <a:ln w="20320">
             <a:solidFill>
               <a:srgbClr val="64748B"/>
             </a:solidFill>
@@ -7182,18 +7833,18 @@
         </p:nvSpPr>
         <p:spPr>
           <a:xfrm>
-            <a:off x="9418320" y="1325880"/>
-            <a:ext cx="2057400" cy="502920"/>
+            <a:off x="9948672" y="1600200"/>
+            <a:ext cx="2148840" cy="777240"/>
           </a:xfrm>
           <a:prstGeom prst="roundRect">
             <a:avLst>
-              <a:gd name="adj" fmla="val 10909"/>
+              <a:gd name="adj" fmla="val 8235"/>
             </a:avLst>
           </a:prstGeom>
           <a:solidFill>
             <a:srgbClr val="F1F5F9"/>
           </a:solidFill>
-          <a:ln w="12700">
+          <a:ln w="15240">
             <a:solidFill>
               <a:srgbClr val="CBD5E1"/>
             </a:solidFill>
@@ -7209,220 +7860,498 @@
         </p:nvSpPr>
         <p:spPr>
           <a:xfrm>
-            <a:off x="9418320" y="1325880"/>
-            <a:ext cx="2057400" cy="502920"/>
-          </a:xfrm>
-          <a:prstGeom prst="rect">
-            <a:avLst/>
-          </a:prstGeom>
-          <a:noFill/>
-          <a:ln/>
-        </p:spPr>
-        <p:txBody>
-          <a:bodyPr wrap="square" lIns="12700" tIns="12700" rIns="12700" bIns="12700" rtlCol="0" anchor="ctr"/>
+            <a:off x="9948672" y="1600200"/>
+            <a:ext cx="2148840" cy="777240"/>
+          </a:xfrm>
+          <a:prstGeom prst="rect">
+            <a:avLst/>
+          </a:prstGeom>
+          <a:noFill/>
+          <a:ln/>
+        </p:spPr>
+        <p:txBody>
+          <a:bodyPr wrap="square" lIns="38100" tIns="38100" rIns="38100" bIns="38100" rtlCol="0" anchor="ctr"/>
           <a:lstStyle/>
           <a:p>
             <a:pPr algn="ctr" indent="0" marL="0">
               <a:buNone/>
             </a:pPr>
             <a:r>
-              <a:rPr lang="en-US" sz="1250" dirty="0">
+              <a:rPr lang="en-US" sz="1400" dirty="0">
                 <a:solidFill>
                   <a:srgbClr val="1E293B"/>
                 </a:solidFill>
               </a:rPr>
               <a:t>fraction per donor</a:t>
             </a:r>
-            <a:endParaRPr lang="en-US" sz="1250" dirty="0"/>
-          </a:p>
-        </p:txBody>
-      </p:sp>
-      <p:pic>
-        <p:nvPicPr>
-          <p:cNvPr id="17" name="Image 0" descr="D:\CS\Genomics\Hackathon\reports\deck/assets/fig_anchor2x2.png">    </p:cNvPr>
-          <p:cNvPicPr>
-            <a:picLocks noChangeAspect="1"/>
-          </p:cNvPicPr>
-          <p:nvPr/>
-        </p:nvPicPr>
-        <p:blipFill>
-          <a:blip r:embed="rId1"/>
-          <a:srcRect l="0" r="0" t="0" b="0"/>
-          <a:stretch/>
-        </p:blipFill>
-        <p:spPr>
-          <a:xfrm>
-            <a:off x="457200" y="1965960"/>
-            <a:ext cx="8229600" cy="4297680"/>
-          </a:xfrm>
-          <a:prstGeom prst="rect">
-            <a:avLst/>
-          </a:prstGeom>
-        </p:spPr>
-      </p:pic>
-      <p:sp>
-        <p:nvSpPr>
-          <p:cNvPr id="18" name="Text 15"/>
-          <p:cNvSpPr/>
-          <p:nvPr/>
-        </p:nvSpPr>
-        <p:spPr>
-          <a:xfrm>
-            <a:off x="8869680" y="2194560"/>
-            <a:ext cx="3017520" cy="1554480"/>
-          </a:xfrm>
-          <a:prstGeom prst="rect">
-            <a:avLst/>
-          </a:prstGeom>
-          <a:noFill/>
-          <a:ln/>
-        </p:spPr>
-        <p:txBody>
-          <a:bodyPr wrap="square" rtlCol="0" anchor="ctr"/>
-          <a:lstStyle/>
-          <a:p>
-            <a:pPr algn="l" marL="342900" indent="-342900">
+            <a:endParaRPr lang="en-US" sz="1400" dirty="0"/>
+          </a:p>
+        </p:txBody>
+      </p:sp>
+      <p:sp>
+        <p:nvSpPr>
+          <p:cNvPr id="17" name="Shape 15"/>
+          <p:cNvSpPr/>
+          <p:nvPr/>
+        </p:nvSpPr>
+        <p:spPr>
+          <a:xfrm>
+            <a:off x="914400" y="2926080"/>
+            <a:ext cx="2468880" cy="914400"/>
+          </a:xfrm>
+          <a:prstGeom prst="roundRect">
+            <a:avLst>
+              <a:gd name="adj" fmla="val 8000"/>
+            </a:avLst>
+          </a:prstGeom>
+          <a:solidFill>
+            <a:srgbClr val="1D4ED8"/>
+          </a:solidFill>
+          <a:ln/>
+          <a:effectLst>
+            <a:outerShdw sx="100000" sy="100000" kx="0" ky="0" algn="bl" rotWithShape="0" blurRad="88900" dist="38100" dir="5400000">
+              <a:srgbClr val="000000">
+                <a:alpha val="12000"/>
+              </a:srgbClr>
+            </a:outerShdw>
+          </a:effectLst>
+        </p:spPr>
+      </p:sp>
+      <p:sp>
+        <p:nvSpPr>
+          <p:cNvPr id="18" name="Text 16"/>
+          <p:cNvSpPr/>
+          <p:nvPr/>
+        </p:nvSpPr>
+        <p:spPr>
+          <a:xfrm>
+            <a:off x="914400" y="2926080"/>
+            <a:ext cx="2468880" cy="914400"/>
+          </a:xfrm>
+          <a:prstGeom prst="rect">
+            <a:avLst/>
+          </a:prstGeom>
+          <a:noFill/>
+          <a:ln/>
+        </p:spPr>
+        <p:txBody>
+          <a:bodyPr wrap="square" lIns="25400" tIns="25400" rIns="25400" bIns="25400" rtlCol="0" anchor="ctr"/>
+          <a:lstStyle/>
+          <a:p>
+            <a:pPr algn="ctr" indent="0" marL="0">
+              <a:buNone/>
+            </a:pPr>
+            <a:r>
+              <a:rPr lang="en-US" sz="1500" b="1" dirty="0">
+                <a:solidFill>
+                  <a:srgbClr val="FFFFFF"/>
+                </a:solidFill>
+              </a:rPr>
+              <a:t>PC-anchor</a:t>
+            </a:r>
+            <a:endParaRPr lang="en-US" sz="1500" dirty="0"/>
+          </a:p>
+          <a:p>
+            <a:pPr algn="ctr" indent="0" marL="0">
+              <a:buNone/>
+            </a:pPr>
+            <a:r>
+              <a:rPr lang="en-US" sz="1500" b="1" dirty="0">
+                <a:solidFill>
+                  <a:srgbClr val="FFFFFF"/>
+                </a:solidFill>
+              </a:rPr>
+              <a:t>PC on / PP off</a:t>
+            </a:r>
+            <a:endParaRPr lang="en-US" sz="1500" dirty="0"/>
+          </a:p>
+        </p:txBody>
+      </p:sp>
+      <p:sp>
+        <p:nvSpPr>
+          <p:cNvPr id="19" name="Shape 17"/>
+          <p:cNvSpPr/>
+          <p:nvPr/>
+        </p:nvSpPr>
+        <p:spPr>
+          <a:xfrm>
+            <a:off x="3657600" y="2926080"/>
+            <a:ext cx="2468880" cy="914400"/>
+          </a:xfrm>
+          <a:prstGeom prst="roundRect">
+            <a:avLst>
+              <a:gd name="adj" fmla="val 8000"/>
+            </a:avLst>
+          </a:prstGeom>
+          <a:solidFill>
+            <a:srgbClr val="EA580C"/>
+          </a:solidFill>
+          <a:ln/>
+          <a:effectLst>
+            <a:outerShdw sx="100000" sy="100000" kx="0" ky="0" algn="bl" rotWithShape="0" blurRad="88900" dist="38100" dir="5400000">
+              <a:srgbClr val="000000">
+                <a:alpha val="12000"/>
+              </a:srgbClr>
+            </a:outerShdw>
+          </a:effectLst>
+        </p:spPr>
+      </p:sp>
+      <p:sp>
+        <p:nvSpPr>
+          <p:cNvPr id="20" name="Text 18"/>
+          <p:cNvSpPr/>
+          <p:nvPr/>
+        </p:nvSpPr>
+        <p:spPr>
+          <a:xfrm>
+            <a:off x="3657600" y="2926080"/>
+            <a:ext cx="2468880" cy="914400"/>
+          </a:xfrm>
+          <a:prstGeom prst="rect">
+            <a:avLst/>
+          </a:prstGeom>
+          <a:noFill/>
+          <a:ln/>
+        </p:spPr>
+        <p:txBody>
+          <a:bodyPr wrap="square" lIns="25400" tIns="25400" rIns="25400" bIns="25400" rtlCol="0" anchor="ctr"/>
+          <a:lstStyle/>
+          <a:p>
+            <a:pPr algn="ctr" indent="0" marL="0">
+              <a:buNone/>
+            </a:pPr>
+            <a:r>
+              <a:rPr lang="en-US" sz="1500" b="1" dirty="0">
+                <a:solidFill>
+                  <a:srgbClr val="FFFFFF"/>
+                </a:solidFill>
+              </a:rPr>
+              <a:t>PP-anchor</a:t>
+            </a:r>
+            <a:endParaRPr lang="en-US" sz="1500" dirty="0"/>
+          </a:p>
+          <a:p>
+            <a:pPr algn="ctr" indent="0" marL="0">
+              <a:buNone/>
+            </a:pPr>
+            <a:r>
+              <a:rPr lang="en-US" sz="1500" b="1" dirty="0">
+                <a:solidFill>
+                  <a:srgbClr val="FFFFFF"/>
+                </a:solidFill>
+              </a:rPr>
+              <a:t>PP on / PC off</a:t>
+            </a:r>
+            <a:endParaRPr lang="en-US" sz="1500" dirty="0"/>
+          </a:p>
+        </p:txBody>
+      </p:sp>
+      <p:sp>
+        <p:nvSpPr>
+          <p:cNvPr id="21" name="Shape 19"/>
+          <p:cNvSpPr/>
+          <p:nvPr/>
+        </p:nvSpPr>
+        <p:spPr>
+          <a:xfrm>
+            <a:off x="6400800" y="2926080"/>
+            <a:ext cx="2468880" cy="914400"/>
+          </a:xfrm>
+          <a:prstGeom prst="roundRect">
+            <a:avLst>
+              <a:gd name="adj" fmla="val 8000"/>
+            </a:avLst>
+          </a:prstGeom>
+          <a:solidFill>
+            <a:srgbClr val="7C3AED"/>
+          </a:solidFill>
+          <a:ln/>
+          <a:effectLst>
+            <a:outerShdw sx="100000" sy="100000" kx="0" ky="0" algn="bl" rotWithShape="0" blurRad="88900" dist="38100" dir="5400000">
+              <a:srgbClr val="000000">
+                <a:alpha val="12000"/>
+              </a:srgbClr>
+            </a:outerShdw>
+          </a:effectLst>
+        </p:spPr>
+      </p:sp>
+      <p:sp>
+        <p:nvSpPr>
+          <p:cNvPr id="22" name="Text 20"/>
+          <p:cNvSpPr/>
+          <p:nvPr/>
+        </p:nvSpPr>
+        <p:spPr>
+          <a:xfrm>
+            <a:off x="6400800" y="2926080"/>
+            <a:ext cx="2468880" cy="914400"/>
+          </a:xfrm>
+          <a:prstGeom prst="rect">
+            <a:avLst/>
+          </a:prstGeom>
+          <a:noFill/>
+          <a:ln/>
+        </p:spPr>
+        <p:txBody>
+          <a:bodyPr wrap="square" lIns="25400" tIns="25400" rIns="25400" bIns="25400" rtlCol="0" anchor="ctr"/>
+          <a:lstStyle/>
+          <a:p>
+            <a:pPr algn="ctr" indent="0" marL="0">
+              <a:buNone/>
+            </a:pPr>
+            <a:r>
+              <a:rPr lang="en-US" sz="1500" b="1" dirty="0">
+                <a:solidFill>
+                  <a:srgbClr val="FFFFFF"/>
+                </a:solidFill>
+              </a:rPr>
+              <a:t>Dual</a:t>
+            </a:r>
+            <a:endParaRPr lang="en-US" sz="1500" dirty="0"/>
+          </a:p>
+          <a:p>
+            <a:pPr algn="ctr" indent="0" marL="0">
+              <a:buNone/>
+            </a:pPr>
+            <a:r>
+              <a:rPr lang="en-US" sz="1500" b="1" dirty="0">
+                <a:solidFill>
+                  <a:srgbClr val="FFFFFF"/>
+                </a:solidFill>
+              </a:rPr>
+              <a:t>both programs on</a:t>
+            </a:r>
+            <a:endParaRPr lang="en-US" sz="1500" dirty="0"/>
+          </a:p>
+        </p:txBody>
+      </p:sp>
+      <p:sp>
+        <p:nvSpPr>
+          <p:cNvPr id="23" name="Shape 21"/>
+          <p:cNvSpPr/>
+          <p:nvPr/>
+        </p:nvSpPr>
+        <p:spPr>
+          <a:xfrm>
+            <a:off x="9144000" y="2926080"/>
+            <a:ext cx="2103120" cy="914400"/>
+          </a:xfrm>
+          <a:prstGeom prst="roundRect">
+            <a:avLst>
+              <a:gd name="adj" fmla="val 8000"/>
+            </a:avLst>
+          </a:prstGeom>
+          <a:solidFill>
+            <a:srgbClr val="9CA3AF"/>
+          </a:solidFill>
+          <a:ln/>
+          <a:effectLst>
+            <a:outerShdw sx="100000" sy="100000" kx="0" ky="0" algn="bl" rotWithShape="0" blurRad="88900" dist="38100" dir="5400000">
+              <a:srgbClr val="000000">
+                <a:alpha val="12000"/>
+              </a:srgbClr>
+            </a:outerShdw>
+          </a:effectLst>
+        </p:spPr>
+      </p:sp>
+      <p:sp>
+        <p:nvSpPr>
+          <p:cNvPr id="24" name="Text 22"/>
+          <p:cNvSpPr/>
+          <p:nvPr/>
+        </p:nvSpPr>
+        <p:spPr>
+          <a:xfrm>
+            <a:off x="9144000" y="2926080"/>
+            <a:ext cx="2103120" cy="914400"/>
+          </a:xfrm>
+          <a:prstGeom prst="rect">
+            <a:avLst/>
+          </a:prstGeom>
+          <a:noFill/>
+          <a:ln/>
+        </p:spPr>
+        <p:txBody>
+          <a:bodyPr wrap="square" lIns="25400" tIns="25400" rIns="25400" bIns="25400" rtlCol="0" anchor="ctr"/>
+          <a:lstStyle/>
+          <a:p>
+            <a:pPr algn="ctr" indent="0" marL="0">
+              <a:buNone/>
+            </a:pPr>
+            <a:r>
+              <a:rPr lang="en-US" sz="1500" b="1" dirty="0">
+                <a:solidFill>
+                  <a:srgbClr val="1E293B"/>
+                </a:solidFill>
+              </a:rPr>
+              <a:t>Null</a:t>
+            </a:r>
+            <a:endParaRPr lang="en-US" sz="1500" dirty="0"/>
+          </a:p>
+          <a:p>
+            <a:pPr algn="ctr" indent="0" marL="0">
+              <a:buNone/>
+            </a:pPr>
+            <a:r>
+              <a:rPr lang="en-US" sz="1500" b="1" dirty="0">
+                <a:solidFill>
+                  <a:srgbClr val="1E293B"/>
+                </a:solidFill>
+              </a:rPr>
+              <a:t>neither on</a:t>
+            </a:r>
+            <a:endParaRPr lang="en-US" sz="1500" dirty="0"/>
+          </a:p>
+        </p:txBody>
+      </p:sp>
+      <p:sp>
+        <p:nvSpPr>
+          <p:cNvPr id="25" name="Text 23"/>
+          <p:cNvSpPr/>
+          <p:nvPr/>
+        </p:nvSpPr>
+        <p:spPr>
+          <a:xfrm>
+            <a:off x="914400" y="4160520"/>
+            <a:ext cx="10607040" cy="1737360"/>
+          </a:xfrm>
+          <a:prstGeom prst="rect">
+            <a:avLst/>
+          </a:prstGeom>
+          <a:noFill/>
+          <a:ln/>
+        </p:spPr>
+        <p:txBody>
+          <a:bodyPr wrap="square" rtlCol="0" anchor="t"/>
+          <a:lstStyle/>
+          <a:p>
+            <a:pPr algn="l" indent="0" marL="0">
               <a:spcAft>
-                <a:spcPts val="400"/>
+                <a:spcPts val="700"/>
               </a:spcAft>
-              <a:buSzPct val="100000"/>
-              <a:buChar char="●"/>
-            </a:pPr>
-            <a:r>
-              <a:rPr lang="en-US" sz="1500" dirty="0">
-                <a:solidFill>
-                  <a:srgbClr val="1D4ED8"/>
-                </a:solidFill>
-              </a:rPr>
-              <a:t>PC-anchor: PC on / PP off</a:t>
-            </a:r>
-            <a:endParaRPr lang="en-US" sz="1500" dirty="0"/>
-          </a:p>
-          <a:p>
-            <a:pPr algn="l" marL="342900" indent="-342900">
+              <a:buNone/>
+            </a:pPr>
+            <a:r>
+              <a:rPr lang="en-US" sz="1600" b="1" dirty="0">
+                <a:solidFill>
+                  <a:srgbClr val="1E293B"/>
+                </a:solidFill>
+              </a:rPr>
+              <a:t>Why raw counts: </a:t>
+            </a:r>
+            <a:pPr algn="l" indent="0" marL="0">
               <a:spcAft>
-                <a:spcPts val="400"/>
+                <a:spcPts val="700"/>
               </a:spcAft>
-              <a:buSzPct val="100000"/>
-              <a:buChar char="●"/>
-            </a:pPr>
-            <a:r>
-              <a:rPr lang="en-US" sz="1500" dirty="0">
-                <a:solidFill>
-                  <a:srgbClr val="EA580C"/>
-                </a:solidFill>
-              </a:rPr>
-              <a:t>PP-anchor: PP on / PC off</a:t>
-            </a:r>
-            <a:endParaRPr lang="en-US" sz="1500" dirty="0"/>
-          </a:p>
-          <a:p>
-            <a:pPr algn="l" marL="342900" indent="-342900">
+              <a:buNone/>
+            </a:pPr>
+            <a:r>
+              <a:rPr lang="en-US" sz="1600" dirty="0">
+                <a:solidFill>
+                  <a:srgbClr val="1E293B"/>
+                </a:solidFill>
+              </a:rPr>
+              <a:t>a single KRT19 or GLUL molecule may be ambient RNA — absolute detection matters, so SCT-normalized values are the wrong object.
+</a:t>
+            </a:r>
+            <a:endParaRPr lang="en-US" sz="1600" dirty="0"/>
+          </a:p>
+          <a:p>
+            <a:pPr algn="l" indent="0" marL="0">
               <a:spcAft>
-                <a:spcPts val="400"/>
+                <a:spcPts val="700"/>
               </a:spcAft>
-              <a:buSzPct val="100000"/>
-              <a:buChar char="●"/>
-            </a:pPr>
-            <a:r>
-              <a:rPr lang="en-US" sz="1500" dirty="0">
+              <a:buNone/>
+            </a:pPr>
+            <a:r>
+              <a:rPr lang="en-US" sz="1600" b="1" dirty="0">
                 <a:solidFill>
                   <a:srgbClr val="7C3AED"/>
                 </a:solidFill>
               </a:rPr>
-              <a:t>Dual: both on</a:t>
-            </a:r>
-            <a:endParaRPr lang="en-US" sz="1500" dirty="0"/>
-          </a:p>
-          <a:p>
-            <a:pPr algn="l" marL="342900" indent="-342900">
+              <a:t>≥2-UMI threshold </a:t>
+            </a:r>
+            <a:pPr algn="l" indent="0" marL="0">
               <a:spcAft>
-                <a:spcPts val="400"/>
+                <a:spcPts val="700"/>
               </a:spcAft>
-              <a:buSzPct val="100000"/>
-              <a:buChar char="●"/>
-            </a:pPr>
-            <a:r>
-              <a:rPr lang="en-US" sz="1500" dirty="0">
-                <a:solidFill>
-                  <a:srgbClr val="64748B"/>
-                </a:solidFill>
-              </a:rPr>
-              <a:t>Null: neither on</a:t>
-            </a:r>
-            <a:endParaRPr lang="en-US" sz="1500" dirty="0"/>
-          </a:p>
-        </p:txBody>
-      </p:sp>
-      <p:sp>
-        <p:nvSpPr>
-          <p:cNvPr id="19" name="Text 16"/>
-          <p:cNvSpPr/>
-          <p:nvPr/>
-        </p:nvSpPr>
-        <p:spPr>
-          <a:xfrm>
-            <a:off x="8869680" y="3840480"/>
-            <a:ext cx="3017520" cy="2194560"/>
-          </a:xfrm>
-          <a:prstGeom prst="rect">
-            <a:avLst/>
-          </a:prstGeom>
-          <a:noFill/>
-          <a:ln/>
-        </p:spPr>
-        <p:txBody>
-          <a:bodyPr wrap="square" rtlCol="0" anchor="t"/>
-          <a:lstStyle/>
-          <a:p>
+              <a:buNone/>
+            </a:pPr>
+            <a:r>
+              <a:rPr lang="en-US" sz="1600" dirty="0">
+                <a:solidFill>
+                  <a:srgbClr val="1E293B"/>
+                </a:solidFill>
+              </a:rPr>
+              <a:t>suppresses single-molecule ambient artifacts.   </a:t>
+            </a:r>
             <a:pPr algn="l" indent="0" marL="0">
-              <a:buNone/>
-            </a:pPr>
-            <a:r>
-              <a:rPr lang="en-US" sz="1450" b="1" dirty="0">
+              <a:spcAft>
+                <a:spcPts val="700"/>
+              </a:spcAft>
+              <a:buNone/>
+            </a:pPr>
+            <a:r>
+              <a:rPr lang="en-US" sz="1600" b="1" dirty="0">
+                <a:solidFill>
+                  <a:srgbClr val="0D9488"/>
+                </a:solidFill>
+              </a:rPr>
+              <a:t>Unit = donor (~47), never the nucleus </a:t>
+            </a:r>
+            <a:pPr algn="l" indent="0" marL="0">
+              <a:spcAft>
+                <a:spcPts val="700"/>
+              </a:spcAft>
+              <a:buNone/>
+            </a:pPr>
+            <a:r>
+              <a:rPr lang="en-US" sz="1600" dirty="0">
                 <a:solidFill>
                   <a:srgbClr val="1E293B"/>
                 </a:solidFill>
               </a:rPr>
-              <a:t>Unit = donor, not nucleus.
+              <a:t>→ no pseudoreplication.
 </a:t>
             </a:r>
-            <a:endParaRPr lang="en-US" sz="1450" dirty="0"/>
+            <a:endParaRPr lang="en-US" sz="1600" dirty="0"/>
           </a:p>
           <a:p>
             <a:pPr algn="l" indent="0" marL="0">
-              <a:buNone/>
-            </a:pPr>
-            <a:r>
-              <a:rPr lang="en-US" sz="1450" dirty="0">
+              <a:spcAft>
+                <a:spcPts val="700"/>
+              </a:spcAft>
+              <a:buNone/>
+            </a:pPr>
+            <a:r>
+              <a:rPr lang="en-US" sz="1600" b="1" dirty="0">
                 <a:solidFill>
                   <a:srgbClr val="1E293B"/>
                 </a:solidFill>
               </a:rPr>
-              <a:t>≥2-UMI cut suppresses single-molecule ambient RNA.
-</a:t>
-            </a:r>
-            <a:endParaRPr lang="en-US" sz="1450" dirty="0"/>
-          </a:p>
-          <a:p>
+              <a:t>Robust across the sensitivity grid </a:t>
+            </a:r>
             <a:pPr algn="l" indent="0" marL="0">
-              <a:buNone/>
-            </a:pPr>
-            <a:r>
-              <a:rPr lang="en-US" sz="1450" dirty="0">
+              <a:spcAft>
+                <a:spcPts val="700"/>
+              </a:spcAft>
+              <a:buNone/>
+            </a:pPr>
+            <a:r>
+              <a:rPr lang="en-US" sz="1600" dirty="0">
                 <a:solidFill>
                   <a:srgbClr val="1E293B"/>
                 </a:solidFill>
               </a:rPr>
-              <a:t>Robust across the marker/threshold sensitivity grid.</a:t>
-            </a:r>
-            <a:endParaRPr lang="en-US" sz="1450" dirty="0"/>
-          </a:p>
-        </p:txBody>
-      </p:sp>
-      <p:sp>
-        <p:nvSpPr>
-          <p:cNvPr id="20" name="Text 17"/>
+              <a:t>(anchor genes, periportal rule, ALDOB in/out, CPS1-based, 1 vs 2 UMI).</a:t>
+            </a:r>
+            <a:endParaRPr lang="en-US" sz="1600" dirty="0"/>
+          </a:p>
+        </p:txBody>
+      </p:sp>
+      <p:sp>
+        <p:nvSpPr>
+          <p:cNvPr id="26" name="Text 24"/>
           <p:cNvSpPr/>
           <p:nvPr/>
         </p:nvSpPr>
@@ -7450,18 +8379,7 @@
                   <a:srgbClr val="64748B"/>
                 </a:solidFill>
               </a:rPr>
-              <a:t>Main result  ·  no large de-zonation route on the biopsy axis</a:t>
-            </a:r>
-            <a:pPr algn="l" indent="0" marL="0">
-              <a:buNone/>
-            </a:pPr>
-            <a:r>
-              <a:rPr lang="en-US" sz="1100" dirty="0">
-                <a:solidFill>
-                  <a:srgbClr val="64748B"/>
-                </a:solidFill>
-              </a:rPr>
-              <a:t>     ·     5 / 8</a:t>
+              <a:t>Method  ·  count-based anchor classification     ·     5 / 9</a:t>
             </a:r>
             <a:endParaRPr lang="en-US" sz="1100" dirty="0"/>
           </a:p>
@@ -7529,7 +8447,7 @@
                   <a:srgbClr val="1E293B"/>
                 </a:solidFill>
               </a:rPr>
-              <a:t>Genome-wide pseudobulk finds one main signal: biliary markers</a:t>
+              <a:t>Matched biopsies do not show PC loss or robust co-expression</a:t>
             </a:r>
             <a:endParaRPr lang="en-US" sz="3000" dirty="0"/>
           </a:p>
@@ -7537,7 +8455,7 @@
       </p:sp>
       <p:pic>
         <p:nvPicPr>
-          <p:cNvPr id="3" name="Image 0" descr="D:\CS\Genomics\Hackathon\reports\deck/assets/fig_volcano.png">    </p:cNvPr>
+          <p:cNvPr id="3" name="Image 0" descr="D:\CS\Genomics\Hackathon\reports\deck/assets/fig_result2.png">    </p:cNvPr>
           <p:cNvPicPr>
             <a:picLocks noChangeAspect="1"/>
           </p:cNvPicPr>
@@ -7550,8 +8468,8 @@
         </p:blipFill>
         <p:spPr>
           <a:xfrm>
-            <a:off x="274320" y="1325880"/>
-            <a:ext cx="8046720" cy="4937760"/>
+            <a:off x="274320" y="1371600"/>
+            <a:ext cx="7955280" cy="4206240"/>
           </a:xfrm>
           <a:prstGeom prst="rect">
             <a:avLst/>
@@ -7566,8 +8484,8 @@
         </p:nvSpPr>
         <p:spPr>
           <a:xfrm>
-            <a:off x="8503920" y="2011680"/>
-            <a:ext cx="3383280" cy="3657600"/>
+            <a:off x="8412480" y="1737360"/>
+            <a:ext cx="3566160" cy="3291840"/>
           </a:xfrm>
           <a:prstGeom prst="rect">
             <a:avLst/>
@@ -7580,9 +8498,17 @@
           <a:lstStyle/>
           <a:p>
             <a:pPr algn="l" indent="0" marL="0">
-              <a:spcAft>
-                <a:spcPts val="1000"/>
-              </a:spcAft>
+              <a:buNone/>
+            </a:pPr>
+            <a:r>
+              <a:rPr lang="en-US" sz="1700" b="1" dirty="0">
+                <a:solidFill>
+                  <a:srgbClr val="475569"/>
+                </a:solidFill>
+              </a:rPr>
+              <a:t>Null fraction (turn-off): </a:t>
+            </a:r>
+            <a:pPr algn="l" indent="0" marL="0">
               <a:buNone/>
             </a:pPr>
             <a:r>
@@ -7591,69 +8517,132 @@
                   <a:srgbClr val="1E293B"/>
                 </a:solidFill>
               </a:rPr>
-              <a:t>Pseudobulk per donor (sum raw hepatocyte UMIs); edgeR TMM + NB quasi-likelihood.
+              <a:t>stable across F1–F4.
 </a:t>
             </a:r>
             <a:endParaRPr lang="en-US" sz="1700" dirty="0"/>
           </a:p>
           <a:p>
             <a:pPr algn="l" indent="0" marL="0">
-              <a:spcAft>
-                <a:spcPts val="1000"/>
-              </a:spcAft>
               <a:buNone/>
             </a:pPr>
             <a:r>
               <a:rPr lang="en-US" sz="1700" b="1" dirty="0">
                 <a:solidFill>
+                  <a:srgbClr val="EA580C"/>
+                </a:solidFill>
+              </a:rPr>
+              <a:t>PP : PC ratio (composition): </a:t>
+            </a:r>
+            <a:pPr algn="l" indent="0" marL="0">
+              <a:buNone/>
+            </a:pPr>
+            <a:r>
+              <a:rPr lang="en-US" sz="1700" dirty="0">
+                <a:solidFill>
                   <a:srgbClr val="1E293B"/>
                 </a:solidFill>
               </a:rPr>
-              <a:t>64 genes at FDR&lt;0.05 — mostly biliary/ductular.
+              <a:t>non-monotone, no drift.
 </a:t>
             </a:r>
             <a:endParaRPr lang="en-US" sz="1700" dirty="0"/>
           </a:p>
           <a:p>
             <a:pPr algn="l" indent="0" marL="0">
-              <a:spcAft>
-                <a:spcPts val="1000"/>
-              </a:spcAft>
-              <a:buNone/>
-            </a:pPr>
-            <a:r>
-              <a:rPr lang="en-US" sz="1700" dirty="0">
+              <a:buNone/>
+            </a:pPr>
+            <a:r>
+              <a:rPr lang="en-US" sz="1700" b="1" dirty="0">
                 <a:solidFill>
                   <a:srgbClr val="1D4ED8"/>
                 </a:solidFill>
               </a:rPr>
-              <a:t>Zonation markers not significant (GLUL FDR 0.80).
-</a:t>
+              <a:t>Equivalence bound: </a:t>
+            </a:r>
+            <a:pPr algn="l" indent="0" marL="0">
+              <a:buNone/>
+            </a:pPr>
+            <a:r>
+              <a:rPr lang="en-US" sz="1700" i="1" dirty="0">
+                <a:solidFill>
+                  <a:srgbClr val="64748B"/>
+                </a:solidFill>
+              </a:rPr>
+              <a:t>a large shift (~20 pp) is excluded; a subtle drift ≤10 pp is not (F4 n=4).</a:t>
             </a:r>
             <a:endParaRPr lang="en-US" sz="1700" dirty="0"/>
           </a:p>
+        </p:txBody>
+      </p:sp>
+      <p:sp>
+        <p:nvSpPr>
+          <p:cNvPr id="5" name="Shape 2"/>
+          <p:cNvSpPr/>
+          <p:nvPr/>
+        </p:nvSpPr>
+        <p:spPr>
+          <a:xfrm>
+            <a:off x="8412480" y="4617720"/>
+            <a:ext cx="3566160" cy="1051560"/>
+          </a:xfrm>
+          <a:prstGeom prst="roundRect">
+            <a:avLst>
+              <a:gd name="adj" fmla="val 6957"/>
+            </a:avLst>
+          </a:prstGeom>
+          <a:solidFill>
+            <a:srgbClr val="ECFDF5"/>
+          </a:solidFill>
+          <a:ln/>
+          <a:effectLst>
+            <a:outerShdw sx="100000" sy="100000" kx="0" ky="0" algn="bl" rotWithShape="0" blurRad="88900" dist="38100" dir="5400000">
+              <a:srgbClr val="000000">
+                <a:alpha val="12000"/>
+              </a:srgbClr>
+            </a:outerShdw>
+          </a:effectLst>
+        </p:spPr>
+      </p:sp>
+      <p:sp>
+        <p:nvSpPr>
+          <p:cNvPr id="6" name="Text 3"/>
+          <p:cNvSpPr/>
+          <p:nvPr/>
+        </p:nvSpPr>
+        <p:spPr>
+          <a:xfrm>
+            <a:off x="8549640" y="4681728"/>
+            <a:ext cx="3291840" cy="914400"/>
+          </a:xfrm>
+          <a:prstGeom prst="rect">
+            <a:avLst/>
+          </a:prstGeom>
+          <a:noFill/>
+          <a:ln/>
+        </p:spPr>
+        <p:txBody>
+          <a:bodyPr wrap="square" rtlCol="0" anchor="ctr"/>
+          <a:lstStyle/>
           <a:p>
             <a:pPr algn="l" indent="0" marL="0">
-              <a:spcAft>
-                <a:spcPts val="1000"/>
-              </a:spcAft>
-              <a:buNone/>
-            </a:pPr>
-            <a:r>
-              <a:rPr lang="en-US" sz="1700" i="1" dirty="0">
-                <a:solidFill>
-                  <a:srgbClr val="7C3AED"/>
-                </a:solidFill>
-              </a:rPr>
-              <a:t>“No large single-gene hepatocyte program outside the biliary/ductular burden.”</a:t>
-            </a:r>
-            <a:endParaRPr lang="en-US" sz="1700" dirty="0"/>
-          </a:p>
-        </p:txBody>
-      </p:sp>
-      <p:sp>
-        <p:nvSpPr>
-          <p:cNvPr id="5" name="Text 2"/>
+              <a:buNone/>
+            </a:pPr>
+            <a:r>
+              <a:rPr lang="en-US" sz="1600" b="1" dirty="0">
+                <a:solidFill>
+                  <a:srgbClr val="065F46"/>
+                </a:solidFill>
+              </a:rPr>
+              <a:t>Donor-level anchor fractions do not support large biopsy-axis de-zonation.</a:t>
+            </a:r>
+            <a:endParaRPr lang="en-US" sz="1600" dirty="0"/>
+          </a:p>
+        </p:txBody>
+      </p:sp>
+      <p:sp>
+        <p:nvSpPr>
+          <p:cNvPr id="7" name="Text 4"/>
           <p:cNvSpPr/>
           <p:nvPr/>
         </p:nvSpPr>
@@ -7681,18 +8670,7 @@
                   <a:srgbClr val="64748B"/>
                 </a:solidFill>
               </a:rPr>
-              <a:t>Discovery scan  ·  cirrhotic F4 vs F1</a:t>
-            </a:r>
-            <a:pPr algn="l" indent="0" marL="0">
-              <a:buNone/>
-            </a:pPr>
-            <a:r>
-              <a:rPr lang="en-US" sz="1100" dirty="0">
-                <a:solidFill>
-                  <a:srgbClr val="64748B"/>
-                </a:solidFill>
-              </a:rPr>
-              <a:t>     ·     6 / 8</a:t>
+              <a:t>Main result  ·  donor = point, line = median  ·  full 4-mechanism panel in backup     ·     6 / 9</a:t>
             </a:r>
             <a:endParaRPr lang="en-US" sz="1100" dirty="0"/>
           </a:p>
@@ -7760,7 +8738,7 @@
                   <a:srgbClr val="1E293B"/>
                 </a:solidFill>
               </a:rPr>
-              <a:t>The biliary signal is real — but likely not broad transdifferentiation</a:t>
+              <a:t>Genome-wide pseudobulk finds one main signal: biliary markers</a:t>
             </a:r>
             <a:endParaRPr lang="en-US" sz="3000" dirty="0"/>
           </a:p>
@@ -7768,7 +8746,7 @@
       </p:sp>
       <p:pic>
         <p:nvPicPr>
-          <p:cNvPr id="3" name="Image 0" descr="D:\CS\Genomics\Hackathon\reports\deck/assets/fig_compositional.png">    </p:cNvPr>
+          <p:cNvPr id="3" name="Image 0" descr="D:\CS\Genomics\Hackathon\reports\deck/assets/fig_volcano.png">    </p:cNvPr>
           <p:cNvPicPr>
             <a:picLocks noChangeAspect="1"/>
           </p:cNvPicPr>
@@ -7781,8 +8759,8 @@
         </p:blipFill>
         <p:spPr>
           <a:xfrm>
-            <a:off x="274320" y="1417320"/>
-            <a:ext cx="11612880" cy="3931920"/>
+            <a:off x="274320" y="1325880"/>
+            <a:ext cx="8046720" cy="4572000"/>
           </a:xfrm>
           <a:prstGeom prst="rect">
             <a:avLst/>
@@ -7797,8 +8775,123 @@
         </p:nvSpPr>
         <p:spPr>
           <a:xfrm>
-            <a:off x="640080" y="5532120"/>
-            <a:ext cx="10972800" cy="1005840"/>
+            <a:off x="8503920" y="1828800"/>
+            <a:ext cx="3383280" cy="3291840"/>
+          </a:xfrm>
+          <a:prstGeom prst="rect">
+            <a:avLst/>
+          </a:prstGeom>
+          <a:noFill/>
+          <a:ln/>
+        </p:spPr>
+        <p:txBody>
+          <a:bodyPr wrap="square" rtlCol="0" anchor="t"/>
+          <a:lstStyle/>
+          <a:p>
+            <a:pPr algn="l" indent="0" marL="0">
+              <a:spcAft>
+                <a:spcPts val="900"/>
+              </a:spcAft>
+              <a:buNone/>
+            </a:pPr>
+            <a:r>
+              <a:rPr lang="en-US" sz="1700" dirty="0">
+                <a:solidFill>
+                  <a:srgbClr val="1E293B"/>
+                </a:solidFill>
+              </a:rPr>
+              <a:t>Pseudobulk per donor (sum raw hepatocyte UMIs); edgeR TMM + NB quasi-likelihood.
+</a:t>
+            </a:r>
+            <a:endParaRPr lang="en-US" sz="1700" dirty="0"/>
+          </a:p>
+          <a:p>
+            <a:pPr algn="l" indent="0" marL="0">
+              <a:spcAft>
+                <a:spcPts val="900"/>
+              </a:spcAft>
+              <a:buNone/>
+            </a:pPr>
+            <a:r>
+              <a:rPr lang="en-US" sz="1700" b="1" dirty="0">
+                <a:solidFill>
+                  <a:srgbClr val="1E293B"/>
+                </a:solidFill>
+              </a:rPr>
+              <a:t>64 genes at FDR&lt;0.05 — mostly biliary/ductular.
+</a:t>
+            </a:r>
+            <a:endParaRPr lang="en-US" sz="1700" dirty="0"/>
+          </a:p>
+          <a:p>
+            <a:pPr algn="l" indent="0" marL="0">
+              <a:spcAft>
+                <a:spcPts val="900"/>
+              </a:spcAft>
+              <a:buNone/>
+            </a:pPr>
+            <a:r>
+              <a:rPr lang="en-US" sz="1700" dirty="0">
+                <a:solidFill>
+                  <a:srgbClr val="1D4ED8"/>
+                </a:solidFill>
+              </a:rPr>
+              <a:t>Zonation markers not significant (GLUL FDR 0.80).
+</a:t>
+            </a:r>
+            <a:endParaRPr lang="en-US" sz="1700" dirty="0"/>
+          </a:p>
+          <a:p>
+            <a:pPr algn="l" indent="0" marL="0">
+              <a:spcAft>
+                <a:spcPts val="900"/>
+              </a:spcAft>
+              <a:buNone/>
+            </a:pPr>
+            <a:r>
+              <a:rPr lang="en-US" sz="1700" i="1" dirty="0">
+                <a:solidFill>
+                  <a:srgbClr val="7C3AED"/>
+                </a:solidFill>
+              </a:rPr>
+              <a:t>“No large single-gene hepatocyte program outside the biliary/ductular burden.”</a:t>
+            </a:r>
+            <a:endParaRPr lang="en-US" sz="1700" dirty="0"/>
+          </a:p>
+        </p:txBody>
+      </p:sp>
+      <p:sp>
+        <p:nvSpPr>
+          <p:cNvPr id="5" name="Shape 2"/>
+          <p:cNvSpPr/>
+          <p:nvPr/>
+        </p:nvSpPr>
+        <p:spPr>
+          <a:xfrm>
+            <a:off x="8503920" y="5212080"/>
+            <a:ext cx="3383280" cy="731520"/>
+          </a:xfrm>
+          <a:prstGeom prst="roundRect">
+            <a:avLst>
+              <a:gd name="adj" fmla="val 7500"/>
+            </a:avLst>
+          </a:prstGeom>
+          <a:solidFill>
+            <a:srgbClr val="F1F5F9"/>
+          </a:solidFill>
+          <a:ln/>
+        </p:spPr>
+      </p:sp>
+      <p:sp>
+        <p:nvSpPr>
+          <p:cNvPr id="6" name="Text 3"/>
+          <p:cNvSpPr/>
+          <p:nvPr/>
+        </p:nvSpPr>
+        <p:spPr>
+          <a:xfrm>
+            <a:off x="8641080" y="5257800"/>
+            <a:ext cx="3108960" cy="640080"/>
           </a:xfrm>
           <a:prstGeom prst="rect">
             <a:avLst/>
@@ -7810,46 +8903,24 @@
           <a:bodyPr wrap="square" rtlCol="0" anchor="ctr"/>
           <a:lstStyle/>
           <a:p>
-            <a:pPr algn="l" marL="342900" indent="-342900">
-              <a:spcAft>
-                <a:spcPts val="600"/>
-              </a:spcAft>
-              <a:buSzPct val="100000"/>
-              <a:buChar char="•"/>
-            </a:pPr>
-            <a:r>
-              <a:rPr lang="en-US" sz="1650" dirty="0">
-                <a:solidFill>
-                  <a:srgbClr val="1E293B"/>
-                </a:solidFill>
-              </a:rPr>
-              <a:t>Ductular reaction enriches cholangiocyte ambient RNA exactly at F4;  true hepatocyte biliary co-expression is rare (~0.4%).</a:t>
-            </a:r>
-            <a:endParaRPr lang="en-US" sz="1650" dirty="0"/>
-          </a:p>
-          <a:p>
-            <a:pPr algn="l" marL="342900" indent="-342900">
-              <a:spcAft>
-                <a:spcPts val="600"/>
-              </a:spcAft>
-              <a:buSzPct val="100000"/>
-              <a:buChar char="•"/>
-            </a:pPr>
-            <a:r>
-              <a:rPr lang="en-US" sz="1650" dirty="0">
-                <a:solidFill>
-                  <a:srgbClr val="DC2626"/>
-                </a:solidFill>
-              </a:rPr>
-              <a:t>CXCL10 is separated as a possible real inflammatory signal — it does not track the cholangiocyte fraction.</a:t>
-            </a:r>
-            <a:endParaRPr lang="en-US" sz="1650" dirty="0"/>
-          </a:p>
-        </p:txBody>
-      </p:sp>
-      <p:sp>
-        <p:nvSpPr>
-          <p:cNvPr id="5" name="Text 2"/>
+            <a:pPr algn="l" indent="0" marL="0">
+              <a:buNone/>
+            </a:pPr>
+            <a:r>
+              <a:rPr lang="en-US" sz="1300" i="1" dirty="0">
+                <a:solidFill>
+                  <a:srgbClr val="64748B"/>
+                </a:solidFill>
+              </a:rPr>
+              <a:t>Caveat: weak coordinated pathways still require gene-set testing (backup).</a:t>
+            </a:r>
+            <a:endParaRPr lang="en-US" sz="1300" dirty="0"/>
+          </a:p>
+        </p:txBody>
+      </p:sp>
+      <p:sp>
+        <p:nvSpPr>
+          <p:cNvPr id="7" name="Text 4"/>
           <p:cNvSpPr/>
           <p:nvPr/>
         </p:nvSpPr>
@@ -7877,18 +8948,7 @@
                   <a:srgbClr val="64748B"/>
                 </a:solidFill>
               </a:rPr>
-              <a:t>Source attribution: consistent with ambient RNA + rare mixed nuclei (a lead, not closed)</a:t>
-            </a:r>
-            <a:pPr algn="l" indent="0" marL="0">
-              <a:buNone/>
-            </a:pPr>
-            <a:r>
-              <a:rPr lang="en-US" sz="1100" dirty="0">
-                <a:solidFill>
-                  <a:srgbClr val="64748B"/>
-                </a:solidFill>
-              </a:rPr>
-              <a:t>     ·     7 / 8</a:t>
+              <a:t>Discovery scan  ·  cirrhotic F4 vs F1     ·     7 / 9</a:t>
             </a:r>
             <a:endParaRPr lang="en-US" sz="1100" dirty="0"/>
           </a:p>
@@ -7905,6 +8965,271 @@
 <file path=ppt/slides/slide8.xml><?xml version="1.0" encoding="utf-8"?>
 <p:sld xmlns:a="http://schemas.openxmlformats.org/drawingml/2006/main" xmlns:r="http://schemas.openxmlformats.org/officeDocument/2006/relationships" xmlns:p="http://schemas.openxmlformats.org/presentationml/2006/main">
   <p:cSld name="Slide 8">
+    <p:bg>
+      <p:bgPr>
+        <a:solidFill>
+          <a:srgbClr val="FFFFFF"/>
+        </a:solidFill>
+      </p:bgPr>
+    </p:bg>
+    <p:spTree>
+      <p:nvGrpSpPr>
+        <p:cNvPr id="1" name=""/>
+        <p:cNvGrpSpPr/>
+        <p:nvPr/>
+      </p:nvGrpSpPr>
+      <p:grpSpPr>
+        <a:xfrm>
+          <a:off x="0" y="0"/>
+          <a:ext cx="0" cy="0"/>
+          <a:chOff x="0" y="0"/>
+          <a:chExt cx="0" cy="0"/>
+        </a:xfrm>
+      </p:grpSpPr>
+      <p:sp>
+        <p:nvSpPr>
+          <p:cNvPr id="2" name="Text 0"/>
+          <p:cNvSpPr/>
+          <p:nvPr/>
+        </p:nvSpPr>
+        <p:spPr>
+          <a:xfrm>
+            <a:off x="457200" y="274320"/>
+            <a:ext cx="11247120" cy="777240"/>
+          </a:xfrm>
+          <a:prstGeom prst="rect">
+            <a:avLst/>
+          </a:prstGeom>
+          <a:noFill/>
+          <a:ln/>
+        </p:spPr>
+        <p:txBody>
+          <a:bodyPr wrap="square" lIns="0" tIns="0" rIns="0" bIns="0" rtlCol="0" anchor="ctr"/>
+          <a:lstStyle/>
+          <a:p>
+            <a:pPr algn="l" indent="0" marL="0">
+              <a:buNone/>
+            </a:pPr>
+            <a:r>
+              <a:rPr lang="en-US" sz="3000" b="1" dirty="0">
+                <a:solidFill>
+                  <a:srgbClr val="1E293B"/>
+                </a:solidFill>
+              </a:rPr>
+              <a:t>The biliary signal is real — but likely not broad transdifferentiation</a:t>
+            </a:r>
+            <a:endParaRPr lang="en-US" sz="3000" dirty="0"/>
+          </a:p>
+        </p:txBody>
+      </p:sp>
+      <p:pic>
+        <p:nvPicPr>
+          <p:cNvPr id="3" name="Image 0" descr="D:\CS\Genomics\Hackathon\reports\deck/assets/fig_compositional.png">    </p:cNvPr>
+          <p:cNvPicPr>
+            <a:picLocks noChangeAspect="1"/>
+          </p:cNvPicPr>
+          <p:nvPr/>
+        </p:nvPicPr>
+        <p:blipFill>
+          <a:blip r:embed="rId1"/>
+          <a:srcRect l="0" r="0" t="0" b="0"/>
+          <a:stretch/>
+        </p:blipFill>
+        <p:spPr>
+          <a:xfrm>
+            <a:off x="274320" y="1371600"/>
+            <a:ext cx="11612880" cy="3657600"/>
+          </a:xfrm>
+          <a:prstGeom prst="rect">
+            <a:avLst/>
+          </a:prstGeom>
+        </p:spPr>
+      </p:pic>
+      <p:sp>
+        <p:nvSpPr>
+          <p:cNvPr id="4" name="Text 1"/>
+          <p:cNvSpPr/>
+          <p:nvPr/>
+        </p:nvSpPr>
+        <p:spPr>
+          <a:xfrm>
+            <a:off x="548640" y="5212080"/>
+            <a:ext cx="11155680" cy="640080"/>
+          </a:xfrm>
+          <a:prstGeom prst="rect">
+            <a:avLst/>
+          </a:prstGeom>
+          <a:noFill/>
+          <a:ln/>
+        </p:spPr>
+        <p:txBody>
+          <a:bodyPr wrap="square" rtlCol="0" anchor="ctr"/>
+          <a:lstStyle/>
+          <a:p>
+            <a:pPr algn="l" indent="0" marL="0">
+              <a:buNone/>
+            </a:pPr>
+            <a:r>
+              <a:rPr lang="en-US" sz="1550" b="1" dirty="0">
+                <a:solidFill>
+                  <a:srgbClr val="065F46"/>
+                </a:solidFill>
+              </a:rPr>
+              <a:t>Strong: </a:t>
+            </a:r>
+            <a:pPr algn="l" indent="0" marL="0">
+              <a:buNone/>
+            </a:pPr>
+            <a:r>
+              <a:rPr lang="en-US" sz="1550" dirty="0">
+                <a:solidFill>
+                  <a:srgbClr val="1E293B"/>
+                </a:solidFill>
+              </a:rPr>
+              <a:t>biliary genes are far more abundant in cholangiocytes;  true hepatocyte co-expression is rare (~0.4%).  </a:t>
+            </a:r>
+            <a:pPr algn="l" indent="0" marL="0">
+              <a:buNone/>
+            </a:pPr>
+            <a:r>
+              <a:rPr lang="en-US" sz="1550" b="1" dirty="0">
+                <a:solidFill>
+                  <a:srgbClr val="B45309"/>
+                </a:solidFill>
+              </a:rPr>
+              <a:t>Suggestive: </a:t>
+            </a:r>
+            <a:pPr algn="l" indent="0" marL="0">
+              <a:buNone/>
+            </a:pPr>
+            <a:r>
+              <a:rPr lang="en-US" sz="1550" dirty="0">
+                <a:solidFill>
+                  <a:srgbClr val="1E293B"/>
+                </a:solidFill>
+              </a:rPr>
+              <a:t>decontX halves the hits (supports an ambient contribution — not proof).  </a:t>
+            </a:r>
+            <a:pPr algn="l" indent="0" marL="0">
+              <a:buNone/>
+            </a:pPr>
+            <a:r>
+              <a:rPr lang="en-US" sz="1550" b="1" dirty="0">
+                <a:solidFill>
+                  <a:srgbClr val="BE123C"/>
+                </a:solidFill>
+              </a:rPr>
+              <a:t>Open: </a:t>
+            </a:r>
+            <a:pPr algn="l" indent="0" marL="0">
+              <a:buNone/>
+            </a:pPr>
+            <a:r>
+              <a:rPr lang="en-US" sz="1550" dirty="0">
+                <a:solidFill>
+                  <a:srgbClr val="1E293B"/>
+                </a:solidFill>
+              </a:rPr>
+              <a:t>EPCAM / SPINT2 / B3GNT3 survive.</a:t>
+            </a:r>
+            <a:endParaRPr lang="en-US" sz="1550" dirty="0"/>
+          </a:p>
+        </p:txBody>
+      </p:sp>
+      <p:sp>
+        <p:nvSpPr>
+          <p:cNvPr id="5" name="Text 2"/>
+          <p:cNvSpPr/>
+          <p:nvPr/>
+        </p:nvSpPr>
+        <p:spPr>
+          <a:xfrm>
+            <a:off x="548640" y="5852160"/>
+            <a:ext cx="11155680" cy="548640"/>
+          </a:xfrm>
+          <a:prstGeom prst="rect">
+            <a:avLst/>
+          </a:prstGeom>
+          <a:noFill/>
+          <a:ln/>
+        </p:spPr>
+        <p:txBody>
+          <a:bodyPr wrap="square" rtlCol="0" anchor="ctr"/>
+          <a:lstStyle/>
+          <a:p>
+            <a:pPr algn="l" indent="0" marL="0">
+              <a:buNone/>
+            </a:pPr>
+            <a:r>
+              <a:rPr lang="en-US" sz="1550" dirty="0">
+                <a:solidFill>
+                  <a:srgbClr val="1E293B"/>
+                </a:solidFill>
+              </a:rPr>
+              <a:t>F4 cholangiocyte expansion is a plausible ambient-RNA source.   </a:t>
+            </a:r>
+            <a:pPr algn="l" indent="0" marL="0">
+              <a:buNone/>
+            </a:pPr>
+            <a:r>
+              <a:rPr lang="en-US" sz="1550" b="1" dirty="0">
+                <a:solidFill>
+                  <a:srgbClr val="DC2626"/>
+                </a:solidFill>
+              </a:rPr>
+              <a:t>CXCL10 is separated as a possible real inflammatory signal — it does not track the cholangiocyte fraction.</a:t>
+            </a:r>
+            <a:endParaRPr lang="en-US" sz="1550" dirty="0"/>
+          </a:p>
+        </p:txBody>
+      </p:sp>
+      <p:sp>
+        <p:nvSpPr>
+          <p:cNvPr id="6" name="Text 3"/>
+          <p:cNvSpPr/>
+          <p:nvPr/>
+        </p:nvSpPr>
+        <p:spPr>
+          <a:xfrm>
+            <a:off x="457200" y="6473952"/>
+            <a:ext cx="11247120" cy="292608"/>
+          </a:xfrm>
+          <a:prstGeom prst="rect">
+            <a:avLst/>
+          </a:prstGeom>
+          <a:noFill/>
+          <a:ln/>
+        </p:spPr>
+        <p:txBody>
+          <a:bodyPr wrap="square" lIns="0" tIns="0" rIns="0" bIns="0" rtlCol="0" anchor="ctr"/>
+          <a:lstStyle/>
+          <a:p>
+            <a:pPr algn="l" indent="0" marL="0">
+              <a:buNone/>
+            </a:pPr>
+            <a:r>
+              <a:rPr lang="en-US" sz="1100" dirty="0">
+                <a:solidFill>
+                  <a:srgbClr val="64748B"/>
+                </a:solidFill>
+              </a:rPr>
+              <a:t>Source attribution: most consistent with ambient RNA + rare mixed nuclei (a lead, not closed)     ·     8 / 9</a:t>
+            </a:r>
+            <a:endParaRPr lang="en-US" sz="1100" dirty="0"/>
+          </a:p>
+        </p:txBody>
+      </p:sp>
+    </p:spTree>
+  </p:cSld>
+  <p:clrMapOvr>
+    <a:masterClrMapping/>
+  </p:clrMapOvr>
+</p:sld>
+</file>
+
+<file path=ppt/slides/slide9.xml><?xml version="1.0" encoding="utf-8"?>
+<p:sld xmlns:a="http://schemas.openxmlformats.org/drawingml/2006/main" xmlns:r="http://schemas.openxmlformats.org/officeDocument/2006/relationships" xmlns:p="http://schemas.openxmlformats.org/presentationml/2006/main">
+  <p:cSld name="Slide 9">
     <p:bg>
       <p:bgPr>
         <a:solidFill>
@@ -8097,7 +9422,7 @@
                   <a:srgbClr val="E2E8F0"/>
                 </a:solidFill>
               </a:rPr>
-              <a:t>Main DGE signal = biliary/ductular burden, likely compositional.</a:t>
+              <a:t>Main DGE signal = biliary/ductular burden, most consistent with composition / ambient RNA.</a:t>
             </a:r>
             <a:endParaRPr lang="en-US" sz="1450" dirty="0"/>
           </a:p>
@@ -8451,207 +9776,9 @@
                   <a:srgbClr val="FFFFFF"/>
                 </a:solidFill>
               </a:rPr>
-              <a:t>The transcriptomic leg of progressive de-zonation does not survive matched-source re-analysis.</a:t>
+              <a:t>The snRNA-seq transcriptomic evidence for progressive de-zonation does not survive matched-source re-analysis.</a:t>
             </a:r>
             <a:endParaRPr lang="en-US" sz="1800" dirty="0"/>
-          </a:p>
-        </p:txBody>
-      </p:sp>
-    </p:spTree>
-  </p:cSld>
-  <p:clrMapOvr>
-    <a:masterClrMapping/>
-  </p:clrMapOvr>
-</p:sld>
-</file>
-
-<file path=ppt/slides/slide9.xml><?xml version="1.0" encoding="utf-8"?>
-<p:sld xmlns:a="http://schemas.openxmlformats.org/drawingml/2006/main" xmlns:r="http://schemas.openxmlformats.org/officeDocument/2006/relationships" xmlns:p="http://schemas.openxmlformats.org/presentationml/2006/main">
-  <p:cSld name="Slide 9">
-    <p:bg>
-      <p:bgPr>
-        <a:solidFill>
-          <a:srgbClr val="FFFFFF"/>
-        </a:solidFill>
-      </p:bgPr>
-    </p:bg>
-    <p:spTree>
-      <p:nvGrpSpPr>
-        <p:cNvPr id="1" name=""/>
-        <p:cNvGrpSpPr/>
-        <p:nvPr/>
-      </p:nvGrpSpPr>
-      <p:grpSpPr>
-        <a:xfrm>
-          <a:off x="0" y="0"/>
-          <a:ext cx="0" cy="0"/>
-          <a:chOff x="0" y="0"/>
-          <a:chExt cx="0" cy="0"/>
-        </a:xfrm>
-      </p:grpSpPr>
-      <p:sp>
-        <p:nvSpPr>
-          <p:cNvPr id="2" name="Text 0"/>
-          <p:cNvSpPr/>
-          <p:nvPr/>
-        </p:nvSpPr>
-        <p:spPr>
-          <a:xfrm>
-            <a:off x="457200" y="256032"/>
-            <a:ext cx="2743200" cy="365760"/>
-          </a:xfrm>
-          <a:prstGeom prst="rect">
-            <a:avLst/>
-          </a:prstGeom>
-          <a:noFill/>
-          <a:ln/>
-        </p:spPr>
-        <p:txBody>
-          <a:bodyPr wrap="square" rtlCol="0" anchor="ctr"/>
-          <a:lstStyle/>
-          <a:p>
-            <a:pPr indent="0" marL="0">
-              <a:buNone/>
-            </a:pPr>
-            <a:r>
-              <a:rPr lang="en-US" sz="1300" b="1" dirty="0">
-                <a:solidFill>
-                  <a:srgbClr val="0D9488"/>
-                </a:solidFill>
-              </a:rPr>
-              <a:t>Backup</a:t>
-            </a:r>
-            <a:endParaRPr lang="en-US" sz="1300" dirty="0"/>
-          </a:p>
-        </p:txBody>
-      </p:sp>
-      <p:sp>
-        <p:nvSpPr>
-          <p:cNvPr id="3" name="Text 1"/>
-          <p:cNvSpPr/>
-          <p:nvPr/>
-        </p:nvSpPr>
-        <p:spPr>
-          <a:xfrm>
-            <a:off x="457200" y="603504"/>
-            <a:ext cx="11247120" cy="731520"/>
-          </a:xfrm>
-          <a:prstGeom prst="rect">
-            <a:avLst/>
-          </a:prstGeom>
-          <a:noFill/>
-          <a:ln/>
-        </p:spPr>
-        <p:txBody>
-          <a:bodyPr wrap="square" rtlCol="0" anchor="ctr"/>
-          <a:lstStyle/>
-          <a:p>
-            <a:pPr algn="l" indent="0" marL="0">
-              <a:buNone/>
-            </a:pPr>
-            <a:r>
-              <a:rPr lang="en-US" sz="2600" b="1" dirty="0">
-                <a:solidFill>
-                  <a:srgbClr val="1E293B"/>
-                </a:solidFill>
-              </a:rPr>
-              <a:t>Are you overturning the paper? No — narrow scope</a:t>
-            </a:r>
-            <a:endParaRPr lang="en-US" sz="2600" dirty="0"/>
-          </a:p>
-        </p:txBody>
-      </p:sp>
-      <p:sp>
-        <p:nvSpPr>
-          <p:cNvPr id="4" name="Text 2"/>
-          <p:cNvSpPr/>
-          <p:nvPr/>
-        </p:nvSpPr>
-        <p:spPr>
-          <a:xfrm>
-            <a:off x="731520" y="1554480"/>
-            <a:ext cx="10607040" cy="4572000"/>
-          </a:xfrm>
-          <a:prstGeom prst="rect">
-            <a:avLst/>
-          </a:prstGeom>
-          <a:noFill/>
-          <a:ln/>
-        </p:spPr>
-        <p:txBody>
-          <a:bodyPr wrap="square" rtlCol="0" anchor="t"/>
-          <a:lstStyle/>
-          <a:p>
-            <a:pPr algn="l" marL="342900" indent="-342900">
-              <a:spcAft>
-                <a:spcPts val="900"/>
-              </a:spcAft>
-              <a:buSzPct val="100000"/>
-              <a:buChar char="•"/>
-            </a:pPr>
-            <a:r>
-              <a:rPr lang="en-US" sz="2000" dirty="0">
-                <a:solidFill>
-                  <a:srgbClr val="1E293B"/>
-                </a:solidFill>
-              </a:rPr>
-              <a:t>We re-tested only the snRNA-seq transcriptional zonation/plasticity evidence.</a:t>
-            </a:r>
-            <a:endParaRPr lang="en-US" sz="2000" dirty="0"/>
-          </a:p>
-          <a:p>
-            <a:pPr algn="l" marL="342900" indent="-342900">
-              <a:spcAft>
-                <a:spcPts val="900"/>
-              </a:spcAft>
-              <a:buSzPct val="100000"/>
-              <a:buChar char="•"/>
-            </a:pPr>
-            <a:r>
-              <a:rPr lang="en-US" sz="2000" dirty="0">
-                <a:solidFill>
-                  <a:srgbClr val="1E293B"/>
-                </a:solidFill>
-              </a:rPr>
-              <a:t>We did NOT test imaging, protein staining, organoids, or 3D architecture.</a:t>
-            </a:r>
-            <a:endParaRPr lang="en-US" sz="2000" dirty="0"/>
-          </a:p>
-          <a:p>
-            <a:pPr algn="l" marL="342900" indent="-342900">
-              <a:spcAft>
-                <a:spcPts val="900"/>
-              </a:spcAft>
-              <a:buSzPct val="100000"/>
-              <a:buChar char="•"/>
-            </a:pPr>
-            <a:r>
-              <a:rPr lang="en-US" sz="2000" dirty="0">
-                <a:solidFill>
-                  <a:srgbClr val="1E293B"/>
-                </a:solidFill>
-              </a:rPr>
-              <a:t>Claim: matched biopsy transcriptomes do not show progressive zonation loss.</a:t>
-            </a:r>
-            <a:endParaRPr lang="en-US" sz="2000" dirty="0"/>
-          </a:p>
-          <a:p>
-            <a:pPr algn="l" marL="342900" indent="-342900">
-              <a:spcAft>
-                <a:spcPts val="900"/>
-              </a:spcAft>
-              <a:buSzPct val="100000"/>
-              <a:buChar char="•"/>
-            </a:pPr>
-            <a:r>
-              <a:rPr lang="en-US" sz="2000" dirty="0">
-                <a:solidFill>
-                  <a:srgbClr val="1E293B"/>
-                </a:solidFill>
-              </a:rPr>
-              <a:t>We agree with the paper that the strong signal is an end-stage phenomenon.</a:t>
-            </a:r>
-            <a:endParaRPr lang="en-US" sz="2000" dirty="0"/>
           </a:p>
         </p:txBody>
       </p:sp>

--- a/reports/deck/MASLD_zonation_reanalysis_8min.pptx
+++ b/reports/deck/MASLD_zonation_reanalysis_8min.pptx
@@ -522,7 +522,7 @@
           <a:p>
             <a:r>
               <a:rPr lang="en-US" dirty="0"/>
-              <a:t>Open: the paper's claim is exciting — as chronic liver disease progresses, hepatocytes lose their zonation, and the most de-zonated ones move toward a biliary/cholangiocyte identity (the headline plasticity finding). Note these are two distinct axes: de-zonation = losing your position along the lobule (still a hepatocyte); transdifferentiation = losing your cell-type identity. We asked whether the single-nucleus EXPRESSION evidence for progressive de-zonation survives once acquisition differences are controlled. Answer up front: in matched needle biopsies, transcriptional zonation is preserved.</a:t>
+              <a:t>Frame it as the project's research question (from the Zonation_Reanalysis framing): the published claim is 'hepatocytes lose their zonation,' and our formal question was whether we can measure how much hepatocyte zonation degrades across MASLD and whether that is linked to the transdifferentiation Paper 1 reported. Answer, clause by clause: the relative ruler is the wrong instrument; there is no detectable biopsy-stage degradation (F1→cirrhotic F4); the healthy→end-stage drop is the tissue-acquisition axis, not disease; and the transdifferentiation link can't be established because biliary markers stay ~0 across biopsy disease and rise only in explants — the same confound.</a:t>
             </a:r>
             <a:endParaRPr lang="en-US" dirty="0"/>
           </a:p>
@@ -2762,8 +2762,8 @@
         </p:nvSpPr>
         <p:spPr>
           <a:xfrm>
-            <a:off x="822960" y="2852928"/>
-            <a:ext cx="4663440" cy="1325880"/>
+            <a:off x="822960" y="2834640"/>
+            <a:ext cx="4663440" cy="1371600"/>
           </a:xfrm>
           <a:prstGeom prst="rect">
             <a:avLst/>
@@ -2779,26 +2779,26 @@
               <a:buNone/>
             </a:pPr>
             <a:r>
-              <a:rPr lang="en-US" sz="1600" b="1" dirty="0">
+              <a:rPr lang="en-US" sz="1450" b="1" dirty="0">
                 <a:solidFill>
                   <a:srgbClr val="FCA5A5"/>
                 </a:solidFill>
               </a:rPr>
-              <a:t>Published claim — Gribben et al.
+              <a:t>The research question (Gribben et al., Nature 2024)
 </a:t>
             </a:r>
             <a:pPr algn="l" indent="0" marL="0">
               <a:buNone/>
             </a:pPr>
             <a:r>
-              <a:rPr lang="en-US" sz="1350" dirty="0">
+              <a:rPr lang="en-US" sz="1300" dirty="0">
                 <a:solidFill>
                   <a:srgbClr val="FECACA"/>
                 </a:solidFill>
               </a:rPr>
-              <a:t>“Hepatocytes lose their zonation” as MASLD progresses, and de-zonated hepatocytes transdifferentiate toward cholangiocytes (epithelial plasticity).</a:t>
-            </a:r>
-            <a:endParaRPr lang="en-US" sz="1600" dirty="0"/>
+              <a:t>Published claim: “Hepatocytes lose their zonation.”  Does hepatocyte zonation degrade across MASLD — and is that degradation linked to the hepatocyte→cholangiocyte transdifferentiation Paper 1 reported?</a:t>
+            </a:r>
+            <a:endParaRPr lang="en-US" sz="1450" dirty="0"/>
           </a:p>
         </p:txBody>
       </p:sp>
@@ -2857,8 +2857,8 @@
         </p:nvSpPr>
         <p:spPr>
           <a:xfrm>
-            <a:off x="6675120" y="2852928"/>
-            <a:ext cx="4663440" cy="1325880"/>
+            <a:off x="6675120" y="2834640"/>
+            <a:ext cx="4663440" cy="1371600"/>
           </a:xfrm>
           <a:prstGeom prst="rect">
             <a:avLst/>
@@ -2874,26 +2874,26 @@
               <a:buNone/>
             </a:pPr>
             <a:r>
-              <a:rPr lang="en-US" sz="1600" b="1" dirty="0">
+              <a:rPr lang="en-US" sz="1450" b="1" dirty="0">
                 <a:solidFill>
                   <a:srgbClr val="5EEAD4"/>
                 </a:solidFill>
               </a:rPr>
-              <a:t>This re-analysis — matched biopsies
+              <a:t>Our answer — matched biopsies
 </a:t>
             </a:r>
             <a:pPr algn="l" indent="0" marL="0">
               <a:buNone/>
             </a:pPr>
             <a:r>
-              <a:rPr lang="en-US" sz="1350" dirty="0">
+              <a:rPr lang="en-US" sz="1300" dirty="0">
                 <a:solidFill>
                   <a:srgbClr val="99F6E4"/>
                 </a:solidFill>
               </a:rPr>
-              <a:t>transcriptional zonation preserved; the reported de-zonation tracks tissue-source confounding; the biliary signal is most consistent with composition / ambient RNA.</a:t>
-            </a:r>
-            <a:endParaRPr lang="en-US" sz="1600" dirty="0"/>
+              <a:t>No detectable biopsy-stage degradation (F1→cirrhotic F4); the “healthy→end-stage” drop is the tissue-acquisition axis; the transdifferentiation link can’t be established (biliary markers rise only in explants).</a:t>
+            </a:r>
+            <a:endParaRPr lang="en-US" sz="1450" dirty="0"/>
           </a:p>
         </p:txBody>
       </p:sp>
@@ -2905,8 +2905,8 @@
         </p:nvSpPr>
         <p:spPr>
           <a:xfrm>
-            <a:off x="640080" y="4617720"/>
-            <a:ext cx="10881360" cy="1554480"/>
+            <a:off x="640080" y="4709160"/>
+            <a:ext cx="10881360" cy="1371600"/>
           </a:xfrm>
           <a:prstGeom prst="rect">
             <a:avLst/>
@@ -2920,21 +2920,21 @@
           <a:p>
             <a:pPr algn="l" indent="0" marL="0">
               <a:spcAft>
-                <a:spcPts val="800"/>
+                <a:spcPts val="1000"/>
               </a:spcAft>
               <a:buNone/>
             </a:pPr>
             <a:r>
               <a:rPr lang="en-US" sz="1800" b="1" dirty="0">
                 <a:solidFill>
-                  <a:srgbClr val="93C5FD"/>
-                </a:solidFill>
-              </a:rPr>
-              <a:t>Question  </a:t>
+                  <a:srgbClr val="5EEAD4"/>
+                </a:solidFill>
+              </a:rPr>
+              <a:t>In one line  </a:t>
             </a:r>
             <a:pPr algn="l" indent="0" marL="0">
               <a:spcAft>
-                <a:spcPts val="800"/>
+                <a:spcPts val="1000"/>
               </a:spcAft>
               <a:buNone/>
             </a:pPr>
@@ -2944,7 +2944,7 @@
                   <a:srgbClr val="E2E8F0"/>
                 </a:solidFill>
               </a:rPr>
-              <a:t>is the snRNA-seq evidence for progressive de-zonation robust?
+              <a:t>the apparent de-zonation is a tissue-acquisition artifact; matched biopsies stay transcriptionally zonated.
 </a:t>
             </a:r>
             <a:endParaRPr lang="en-US" sz="1800" dirty="0"/>
@@ -2952,53 +2952,21 @@
           <a:p>
             <a:pPr algn="l" indent="0" marL="0">
               <a:spcAft>
-                <a:spcPts val="800"/>
+                <a:spcPts val="1000"/>
               </a:spcAft>
               <a:buNone/>
             </a:pPr>
             <a:r>
               <a:rPr lang="en-US" sz="1800" b="1" dirty="0">
                 <a:solidFill>
-                  <a:srgbClr val="5EEAD4"/>
-                </a:solidFill>
-              </a:rPr>
-              <a:t>Answer  </a:t>
+                  <a:srgbClr val="CBD5E1"/>
+                </a:solidFill>
+              </a:rPr>
+              <a:t>Scope  </a:t>
             </a:r>
             <a:pPr algn="l" indent="0" marL="0">
               <a:spcAft>
-                <a:spcPts val="800"/>
-              </a:spcAft>
-              <a:buNone/>
-            </a:pPr>
-            <a:r>
-              <a:rPr lang="en-US" sz="1800" dirty="0">
-                <a:solidFill>
-                  <a:srgbClr val="E2E8F0"/>
-                </a:solidFill>
-              </a:rPr>
-              <a:t>not across matched biopsy F1–F4 tissue.
-</a:t>
-            </a:r>
-            <a:endParaRPr lang="en-US" sz="1800" dirty="0"/>
-          </a:p>
-          <a:p>
-            <a:pPr algn="l" indent="0" marL="0">
-              <a:spcAft>
-                <a:spcPts val="800"/>
-              </a:spcAft>
-              <a:buNone/>
-            </a:pPr>
-            <a:r>
-              <a:rPr lang="en-US" sz="1800" b="1" dirty="0">
-                <a:solidFill>
-                  <a:srgbClr val="CBD5E1"/>
-                </a:solidFill>
-              </a:rPr>
-              <a:t>Scope  </a:t>
-            </a:r>
-            <a:pPr algn="l" indent="0" marL="0">
-              <a:spcAft>
-                <a:spcPts val="800"/>
+                <a:spcPts val="1000"/>
               </a:spcAft>
               <a:buNone/>
             </a:pPr>
